--- a/frequency distribution.pptx
+++ b/frequency distribution.pptx
@@ -7308,8 +7308,8 @@
           </a:p>
         </p:txBody>
       </p:sp>
-      <mc:AlternateContent xmlns:mc="http://schemas.openxmlformats.org/markup-compatibility/2006">
-        <mc:Choice xmlns:a14="http://schemas.microsoft.com/office/drawing/2010/main" Requires="a14">
+      <mc:AlternateContent xmlns:mc="http://schemas.openxmlformats.org/markup-compatibility/2006" xmlns:a14="http://schemas.microsoft.com/office/drawing/2010/main">
+        <mc:Choice Requires="a14">
           <p:sp>
             <p:nvSpPr>
               <p:cNvPr id="7" name="TextBox 6">
@@ -7396,7 +7396,7 @@
             </p:txBody>
           </p:sp>
         </mc:Choice>
-        <mc:Fallback>
+        <mc:Fallback xmlns="">
           <p:sp>
             <p:nvSpPr>
               <p:cNvPr id="7" name="TextBox 6">
@@ -7441,8 +7441,8 @@
           </p:sp>
         </mc:Fallback>
       </mc:AlternateContent>
-      <mc:AlternateContent xmlns:mc="http://schemas.openxmlformats.org/markup-compatibility/2006">
-        <mc:Choice xmlns:a14="http://schemas.microsoft.com/office/drawing/2010/main" Requires="a14">
+      <mc:AlternateContent xmlns:mc="http://schemas.openxmlformats.org/markup-compatibility/2006" xmlns:a14="http://schemas.microsoft.com/office/drawing/2010/main">
+        <mc:Choice Requires="a14">
           <p:sp>
             <p:nvSpPr>
               <p:cNvPr id="36" name="TextBox 35">
@@ -7559,7 +7559,7 @@
             </p:txBody>
           </p:sp>
         </mc:Choice>
-        <mc:Fallback>
+        <mc:Fallback xmlns="">
           <p:sp>
             <p:nvSpPr>
               <p:cNvPr id="36" name="TextBox 35">
@@ -7721,8 +7721,8 @@
           </a:p>
         </p:txBody>
       </p:sp>
-      <mc:AlternateContent xmlns:mc="http://schemas.openxmlformats.org/markup-compatibility/2006">
-        <mc:Choice xmlns:a14="http://schemas.microsoft.com/office/drawing/2010/main" Requires="a14">
+      <mc:AlternateContent xmlns:mc="http://schemas.openxmlformats.org/markup-compatibility/2006" xmlns:a14="http://schemas.microsoft.com/office/drawing/2010/main">
+        <mc:Choice Requires="a14">
           <p:sp>
             <p:nvSpPr>
               <p:cNvPr id="39" name="TextBox 38">
@@ -7839,7 +7839,7 @@
             </p:txBody>
           </p:sp>
         </mc:Choice>
-        <mc:Fallback>
+        <mc:Fallback xmlns="">
           <p:sp>
             <p:nvSpPr>
               <p:cNvPr id="39" name="TextBox 38">
@@ -7884,8 +7884,8 @@
           </p:sp>
         </mc:Fallback>
       </mc:AlternateContent>
-      <mc:AlternateContent xmlns:mc="http://schemas.openxmlformats.org/markup-compatibility/2006">
-        <mc:Choice xmlns:a14="http://schemas.microsoft.com/office/drawing/2010/main" Requires="a14">
+      <mc:AlternateContent xmlns:mc="http://schemas.openxmlformats.org/markup-compatibility/2006" xmlns:a14="http://schemas.microsoft.com/office/drawing/2010/main">
+        <mc:Choice Requires="a14">
           <p:sp>
             <p:nvSpPr>
               <p:cNvPr id="40" name="TextBox 39">
@@ -8002,7 +8002,7 @@
             </p:txBody>
           </p:sp>
         </mc:Choice>
-        <mc:Fallback>
+        <mc:Fallback xmlns="">
           <p:sp>
             <p:nvSpPr>
               <p:cNvPr id="40" name="TextBox 39">
@@ -8047,8 +8047,8 @@
           </p:sp>
         </mc:Fallback>
       </mc:AlternateContent>
-      <mc:AlternateContent xmlns:mc="http://schemas.openxmlformats.org/markup-compatibility/2006">
-        <mc:Choice xmlns:a14="http://schemas.microsoft.com/office/drawing/2010/main" Requires="a14">
+      <mc:AlternateContent xmlns:mc="http://schemas.openxmlformats.org/markup-compatibility/2006" xmlns:a14="http://schemas.microsoft.com/office/drawing/2010/main">
+        <mc:Choice Requires="a14">
           <p:sp>
             <p:nvSpPr>
               <p:cNvPr id="43" name="TextBox 42">
@@ -8192,7 +8192,7 @@
             </p:txBody>
           </p:sp>
         </mc:Choice>
-        <mc:Fallback>
+        <mc:Fallback xmlns="">
           <p:sp>
             <p:nvSpPr>
               <p:cNvPr id="43" name="TextBox 42">
@@ -8237,8 +8237,8 @@
           </p:sp>
         </mc:Fallback>
       </mc:AlternateContent>
-      <mc:AlternateContent xmlns:mc="http://schemas.openxmlformats.org/markup-compatibility/2006">
-        <mc:Choice xmlns:a14="http://schemas.microsoft.com/office/drawing/2010/main" Requires="a14">
+      <mc:AlternateContent xmlns:mc="http://schemas.openxmlformats.org/markup-compatibility/2006" xmlns:a14="http://schemas.microsoft.com/office/drawing/2010/main">
+        <mc:Choice Requires="a14">
           <p:sp>
             <p:nvSpPr>
               <p:cNvPr id="44" name="TextBox 43">
@@ -8355,7 +8355,7 @@
             </p:txBody>
           </p:sp>
         </mc:Choice>
-        <mc:Fallback>
+        <mc:Fallback xmlns="">
           <p:sp>
             <p:nvSpPr>
               <p:cNvPr id="44" name="TextBox 43">
@@ -8400,8 +8400,8 @@
           </p:sp>
         </mc:Fallback>
       </mc:AlternateContent>
-      <mc:AlternateContent xmlns:mc="http://schemas.openxmlformats.org/markup-compatibility/2006">
-        <mc:Choice xmlns:a14="http://schemas.microsoft.com/office/drawing/2010/main" Requires="a14">
+      <mc:AlternateContent xmlns:mc="http://schemas.openxmlformats.org/markup-compatibility/2006" xmlns:a14="http://schemas.microsoft.com/office/drawing/2010/main">
+        <mc:Choice Requires="a14">
           <p:sp>
             <p:nvSpPr>
               <p:cNvPr id="46" name="TextBox 45">
@@ -8545,7 +8545,7 @@
             </p:txBody>
           </p:sp>
         </mc:Choice>
-        <mc:Fallback>
+        <mc:Fallback xmlns="">
           <p:sp>
             <p:nvSpPr>
               <p:cNvPr id="46" name="TextBox 45">
@@ -8590,8 +8590,8 @@
           </p:sp>
         </mc:Fallback>
       </mc:AlternateContent>
-      <mc:AlternateContent xmlns:mc="http://schemas.openxmlformats.org/markup-compatibility/2006">
-        <mc:Choice xmlns:a14="http://schemas.microsoft.com/office/drawing/2010/main" Requires="a14">
+      <mc:AlternateContent xmlns:mc="http://schemas.openxmlformats.org/markup-compatibility/2006" xmlns:a14="http://schemas.microsoft.com/office/drawing/2010/main">
+        <mc:Choice Requires="a14">
           <p:sp>
             <p:nvSpPr>
               <p:cNvPr id="54" name="TextBox 53">
@@ -8708,7 +8708,7 @@
             </p:txBody>
           </p:sp>
         </mc:Choice>
-        <mc:Fallback>
+        <mc:Fallback xmlns="">
           <p:sp>
             <p:nvSpPr>
               <p:cNvPr id="54" name="TextBox 53">
@@ -8753,8 +8753,8 @@
           </p:sp>
         </mc:Fallback>
       </mc:AlternateContent>
-      <mc:AlternateContent xmlns:mc="http://schemas.openxmlformats.org/markup-compatibility/2006">
-        <mc:Choice xmlns:a14="http://schemas.microsoft.com/office/drawing/2010/main" Requires="a14">
+      <mc:AlternateContent xmlns:mc="http://schemas.openxmlformats.org/markup-compatibility/2006" xmlns:a14="http://schemas.microsoft.com/office/drawing/2010/main">
+        <mc:Choice Requires="a14">
           <p:sp>
             <p:nvSpPr>
               <p:cNvPr id="57" name="TextBox 56">
@@ -8871,7 +8871,7 @@
             </p:txBody>
           </p:sp>
         </mc:Choice>
-        <mc:Fallback>
+        <mc:Fallback xmlns="">
           <p:sp>
             <p:nvSpPr>
               <p:cNvPr id="57" name="TextBox 56">
@@ -8964,8 +8964,8 @@
           </a:fontRef>
         </p:style>
       </p:cxnSp>
-      <mc:AlternateContent xmlns:mc="http://schemas.openxmlformats.org/markup-compatibility/2006">
-        <mc:Choice xmlns:a14="http://schemas.microsoft.com/office/drawing/2010/main" Requires="a14">
+      <mc:AlternateContent xmlns:mc="http://schemas.openxmlformats.org/markup-compatibility/2006" xmlns:a14="http://schemas.microsoft.com/office/drawing/2010/main">
+        <mc:Choice Requires="a14">
           <p:sp>
             <p:nvSpPr>
               <p:cNvPr id="59" name="TextBox 58">
@@ -9082,7 +9082,7 @@
             </p:txBody>
           </p:sp>
         </mc:Choice>
-        <mc:Fallback>
+        <mc:Fallback xmlns="">
           <p:sp>
             <p:nvSpPr>
               <p:cNvPr id="59" name="TextBox 58">
@@ -9228,8 +9228,12 @@
           <a:lstStyle/>
           <a:p>
             <a:r>
+              <a:rPr lang="en-US"/>
+              <a:t>miniLISA</a:t>
+            </a:r>
+            <a:r>
               <a:rPr lang="en-US" dirty="0"/>
-              <a:t>LISA Timing Jitters</a:t>
+              <a:t> Timing Jitters</a:t>
             </a:r>
             <a:endParaRPr lang="LID4096" dirty="0"/>
           </a:p>
@@ -9886,8 +9890,8 @@
           </a:p>
         </p:txBody>
       </p:sp>
-      <mc:AlternateContent xmlns:mc="http://schemas.openxmlformats.org/markup-compatibility/2006">
-        <mc:Choice xmlns:a14="http://schemas.microsoft.com/office/drawing/2010/main" Requires="a14">
+      <mc:AlternateContent xmlns:mc="http://schemas.openxmlformats.org/markup-compatibility/2006" xmlns:a14="http://schemas.microsoft.com/office/drawing/2010/main">
+        <mc:Choice Requires="a14">
           <p:sp>
             <p:nvSpPr>
               <p:cNvPr id="40" name="TextBox 39">
@@ -10004,7 +10008,7 @@
             </p:txBody>
           </p:sp>
         </mc:Choice>
-        <mc:Fallback>
+        <mc:Fallback xmlns="">
           <p:sp>
             <p:nvSpPr>
               <p:cNvPr id="40" name="TextBox 39">
@@ -10097,8 +10101,8 @@
           </a:fontRef>
         </p:style>
       </p:cxnSp>
-      <mc:AlternateContent xmlns:mc="http://schemas.openxmlformats.org/markup-compatibility/2006">
-        <mc:Choice xmlns:a14="http://schemas.microsoft.com/office/drawing/2010/main" Requires="a14">
+      <mc:AlternateContent xmlns:mc="http://schemas.openxmlformats.org/markup-compatibility/2006" xmlns:a14="http://schemas.microsoft.com/office/drawing/2010/main">
+        <mc:Choice Requires="a14">
           <p:sp>
             <p:nvSpPr>
               <p:cNvPr id="58" name="TextBox 57">
@@ -10215,7 +10219,7 @@
             </p:txBody>
           </p:sp>
         </mc:Choice>
-        <mc:Fallback>
+        <mc:Fallback xmlns="">
           <p:sp>
             <p:nvSpPr>
               <p:cNvPr id="58" name="TextBox 57">
@@ -10515,8 +10519,8 @@
           </a:p>
         </p:txBody>
       </p:sp>
-      <mc:AlternateContent xmlns:mc="http://schemas.openxmlformats.org/markup-compatibility/2006">
-        <mc:Choice xmlns:a14="http://schemas.microsoft.com/office/drawing/2010/main" Requires="a14">
+      <mc:AlternateContent xmlns:mc="http://schemas.openxmlformats.org/markup-compatibility/2006" xmlns:a14="http://schemas.microsoft.com/office/drawing/2010/main">
+        <mc:Choice Requires="a14">
           <p:sp>
             <p:nvSpPr>
               <p:cNvPr id="7" name="TextBox 6">
@@ -10545,6 +10549,7 @@
               </a:bodyPr>
               <a:lstStyle/>
               <a:p>
+                <a:pPr/>
                 <a14:m>
                   <m:oMathPara xmlns:m="http://schemas.openxmlformats.org/officeDocument/2006/math">
                     <m:oMathParaPr>
@@ -10763,7 +10768,7 @@
             </p:txBody>
           </p:sp>
         </mc:Choice>
-        <mc:Fallback>
+        <mc:Fallback xmlns="">
           <p:sp>
             <p:nvSpPr>
               <p:cNvPr id="7" name="TextBox 6">
@@ -10808,8 +10813,8 @@
           </p:sp>
         </mc:Fallback>
       </mc:AlternateContent>
-      <mc:AlternateContent xmlns:mc="http://schemas.openxmlformats.org/markup-compatibility/2006">
-        <mc:Choice xmlns:a14="http://schemas.microsoft.com/office/drawing/2010/main" Requires="a14">
+      <mc:AlternateContent xmlns:mc="http://schemas.openxmlformats.org/markup-compatibility/2006" xmlns:a14="http://schemas.microsoft.com/office/drawing/2010/main">
+        <mc:Choice Requires="a14">
           <p:sp>
             <p:nvSpPr>
               <p:cNvPr id="10" name="TextBox 9">
@@ -10838,6 +10843,7 @@
               </a:bodyPr>
               <a:lstStyle/>
               <a:p>
+                <a:pPr/>
                 <a14:m>
                   <m:oMathPara xmlns:m="http://schemas.openxmlformats.org/officeDocument/2006/math">
                     <m:oMathParaPr>
@@ -11096,7 +11102,7 @@
             </p:txBody>
           </p:sp>
         </mc:Choice>
-        <mc:Fallback>
+        <mc:Fallback xmlns="">
           <p:sp>
             <p:nvSpPr>
               <p:cNvPr id="10" name="TextBox 9">
@@ -11141,8 +11147,8 @@
           </p:sp>
         </mc:Fallback>
       </mc:AlternateContent>
-      <mc:AlternateContent xmlns:mc="http://schemas.openxmlformats.org/markup-compatibility/2006">
-        <mc:Choice xmlns:a14="http://schemas.microsoft.com/office/drawing/2010/main" Requires="a14">
+      <mc:AlternateContent xmlns:mc="http://schemas.openxmlformats.org/markup-compatibility/2006" xmlns:a14="http://schemas.microsoft.com/office/drawing/2010/main">
+        <mc:Choice Requires="a14">
           <p:sp>
             <p:nvSpPr>
               <p:cNvPr id="11" name="TextBox 10">
@@ -11171,6 +11177,7 @@
               </a:bodyPr>
               <a:lstStyle/>
               <a:p>
+                <a:pPr/>
                 <a14:m>
                   <m:oMathPara xmlns:m="http://schemas.openxmlformats.org/officeDocument/2006/math">
                     <m:oMathParaPr>
@@ -11381,7 +11388,7 @@
             </p:txBody>
           </p:sp>
         </mc:Choice>
-        <mc:Fallback>
+        <mc:Fallback xmlns="">
           <p:sp>
             <p:nvSpPr>
               <p:cNvPr id="11" name="TextBox 10">
@@ -11426,8 +11433,8 @@
           </p:sp>
         </mc:Fallback>
       </mc:AlternateContent>
-      <mc:AlternateContent xmlns:mc="http://schemas.openxmlformats.org/markup-compatibility/2006">
-        <mc:Choice xmlns:a14="http://schemas.microsoft.com/office/drawing/2010/main" Requires="a14">
+      <mc:AlternateContent xmlns:mc="http://schemas.openxmlformats.org/markup-compatibility/2006" xmlns:a14="http://schemas.microsoft.com/office/drawing/2010/main">
+        <mc:Choice Requires="a14">
           <p:sp>
             <p:nvSpPr>
               <p:cNvPr id="12" name="TextBox 11">
@@ -11456,6 +11463,7 @@
               </a:bodyPr>
               <a:lstStyle/>
               <a:p>
+                <a:pPr/>
                 <a14:m>
                   <m:oMathPara xmlns:m="http://schemas.openxmlformats.org/officeDocument/2006/math">
                     <m:oMathParaPr>
@@ -11693,7 +11701,7 @@
             </p:txBody>
           </p:sp>
         </mc:Choice>
-        <mc:Fallback>
+        <mc:Fallback xmlns="">
           <p:sp>
             <p:nvSpPr>
               <p:cNvPr id="12" name="TextBox 11">

--- a/frequency distribution.pptx
+++ b/frequency distribution.pptx
@@ -219,7 +219,7 @@
           <a:p>
             <a:fld id="{AB81B2D2-06A2-4596-9391-656CA05E965F}" type="datetimeFigureOut">
               <a:rPr lang="et-EE" smtClean="0"/>
-              <a:t>28.10.2025</a:t>
+              <a:t>04.11.2025</a:t>
             </a:fld>
             <a:endParaRPr lang="et-EE"/>
           </a:p>
@@ -633,7 +633,7 @@
           <a:p>
             <a:fld id="{0E412FDE-1CFE-48F6-820F-9C443C301228}" type="datetime1">
               <a:rPr lang="et-EE" smtClean="0"/>
-              <a:t>28.10.2025</a:t>
+              <a:t>04.11.2025</a:t>
             </a:fld>
             <a:endParaRPr lang="et-EE" dirty="0"/>
           </a:p>
@@ -817,7 +817,7 @@
           <a:p>
             <a:fld id="{B64C0CFC-214E-42F4-8B82-CC6D451BD70F}" type="datetime1">
               <a:rPr lang="et-EE" smtClean="0"/>
-              <a:t>28.10.2025</a:t>
+              <a:t>04.11.2025</a:t>
             </a:fld>
             <a:endParaRPr lang="et-EE"/>
           </a:p>
@@ -1000,7 +1000,7 @@
           <a:p>
             <a:fld id="{5AB58BF1-41C1-47B8-ACAE-F9884B88C63A}" type="datetime1">
               <a:rPr lang="et-EE" smtClean="0"/>
-              <a:t>28.10.2025</a:t>
+              <a:t>04.11.2025</a:t>
             </a:fld>
             <a:endParaRPr lang="et-EE"/>
           </a:p>
@@ -1262,7 +1262,7 @@
           <a:p>
             <a:fld id="{E1CF8E31-244F-4A6A-A7D5-704B96C48AAE}" type="datetime1">
               <a:rPr lang="et-EE" smtClean="0"/>
-              <a:t>28.10.2025</a:t>
+              <a:t>04.11.2025</a:t>
             </a:fld>
             <a:endParaRPr lang="et-EE" dirty="0"/>
           </a:p>
@@ -1974,7 +1974,7 @@
           <a:p>
             <a:fld id="{CF92296B-3A94-4787-AA7D-8DC0AEE88FD4}" type="datetime1">
               <a:rPr lang="et-EE" smtClean="0"/>
-              <a:t>28.10.2025</a:t>
+              <a:t>04.11.2025</a:t>
             </a:fld>
             <a:endParaRPr lang="et-EE"/>
           </a:p>
@@ -2344,7 +2344,7 @@
           <a:p>
             <a:fld id="{185751C1-87AF-4EAC-9696-BB82432B7753}" type="datetime1">
               <a:rPr lang="et-EE" smtClean="0"/>
-              <a:t>28.10.2025</a:t>
+              <a:t>04.11.2025</a:t>
             </a:fld>
             <a:endParaRPr lang="et-EE"/>
           </a:p>
@@ -2442,7 +2442,7 @@
           <a:p>
             <a:fld id="{E493E3B0-4572-4FE0-8E55-6746BFAADA96}" type="datetime1">
               <a:rPr lang="et-EE" smtClean="0"/>
-              <a:t>28.10.2025</a:t>
+              <a:t>04.11.2025</a:t>
             </a:fld>
             <a:endParaRPr lang="et-EE"/>
           </a:p>
@@ -2587,7 +2587,7 @@
           <a:p>
             <a:fld id="{EE4C4D14-98D7-455C-9D0D-2863E0C0AA0D}" type="datetime1">
               <a:rPr lang="et-EE" smtClean="0"/>
-              <a:t>28.10.2025</a:t>
+              <a:t>04.11.2025</a:t>
             </a:fld>
             <a:endParaRPr lang="et-EE"/>
           </a:p>
@@ -2867,7 +2867,7 @@
           <a:p>
             <a:fld id="{94997DBE-8AE5-4A6F-9E25-F62C693D8ED5}" type="datetime1">
               <a:rPr lang="et-EE" smtClean="0"/>
-              <a:t>28.10.2025</a:t>
+              <a:t>04.11.2025</a:t>
             </a:fld>
             <a:endParaRPr lang="et-EE"/>
           </a:p>
@@ -3127,7 +3127,7 @@
           <a:p>
             <a:fld id="{DA3B51F9-97BE-4EFF-9934-D6DB8E40FF5E}" type="datetime1">
               <a:rPr lang="et-EE" smtClean="0"/>
-              <a:t>28.10.2025</a:t>
+              <a:t>04.11.2025</a:t>
             </a:fld>
             <a:endParaRPr lang="et-EE"/>
           </a:p>
@@ -3344,7 +3344,7 @@
           <a:p>
             <a:fld id="{E7C7EEDD-722C-4F14-9239-A37AD281B51F}" type="datetime1">
               <a:rPr lang="et-EE" smtClean="0"/>
-              <a:t>28.10.2025</a:t>
+              <a:t>04.11.2025</a:t>
             </a:fld>
             <a:endParaRPr lang="et-EE" dirty="0"/>
           </a:p>
@@ -3810,7 +3810,7 @@
           <a:p>
             <a:fld id="{E1CF8E31-244F-4A6A-A7D5-704B96C48AAE}" type="datetime1">
               <a:rPr lang="et-EE" smtClean="0"/>
-              <a:t>28.10.2025</a:t>
+              <a:t>04.11.2025</a:t>
             </a:fld>
             <a:endParaRPr lang="et-EE" dirty="0"/>
           </a:p>
@@ -4332,7 +4332,7 @@
           <a:p>
             <a:fld id="{E1CF8E31-244F-4A6A-A7D5-704B96C48AAE}" type="datetime1">
               <a:rPr lang="et-EE" smtClean="0"/>
-              <a:t>28.10.2025</a:t>
+              <a:t>04.11.2025</a:t>
             </a:fld>
             <a:endParaRPr lang="et-EE" dirty="0"/>
           </a:p>
@@ -5910,7 +5910,7 @@
           <a:p>
             <a:fld id="{E1CF8E31-244F-4A6A-A7D5-704B96C48AAE}" type="datetime1">
               <a:rPr lang="et-EE" smtClean="0"/>
-              <a:t>28.10.2025</a:t>
+              <a:t>04.11.2025</a:t>
             </a:fld>
             <a:endParaRPr lang="et-EE" dirty="0"/>
           </a:p>
@@ -9262,7 +9262,7 @@
           <a:p>
             <a:fld id="{E1CF8E31-244F-4A6A-A7D5-704B96C48AAE}" type="datetime1">
               <a:rPr lang="et-EE" smtClean="0"/>
-              <a:t>28.10.2025</a:t>
+              <a:t>04.11.2025</a:t>
             </a:fld>
             <a:endParaRPr lang="et-EE" dirty="0"/>
           </a:p>
@@ -10264,6 +10264,61 @@
           </p:sp>
         </mc:Fallback>
       </mc:AlternateContent>
+      <p:sp>
+        <p:nvSpPr>
+          <p:cNvPr id="3" name="TextBox 2">
+            <a:extLst>
+              <a:ext uri="{FF2B5EF4-FFF2-40B4-BE49-F238E27FC236}">
+                <a16:creationId xmlns:a16="http://schemas.microsoft.com/office/drawing/2014/main" id="{73AF7F7F-A72D-40A5-9A91-7A6E6669C514}"/>
+              </a:ext>
+            </a:extLst>
+          </p:cNvPr>
+          <p:cNvSpPr txBox="1"/>
+          <p:nvPr/>
+        </p:nvSpPr>
+        <p:spPr>
+          <a:xfrm>
+            <a:off x="2009823" y="5022238"/>
+            <a:ext cx="5103000" cy="307777"/>
+          </a:xfrm>
+          <a:prstGeom prst="rect">
+            <a:avLst/>
+          </a:prstGeom>
+          <a:noFill/>
+        </p:spPr>
+        <p:txBody>
+          <a:bodyPr wrap="none" rtlCol="0">
+            <a:spAutoFit/>
+          </a:bodyPr>
+          <a:lstStyle/>
+          <a:p>
+            <a:pPr algn="l"/>
+            <a:r>
+              <a:rPr lang="en-US" sz="1400" dirty="0">
+                <a:solidFill>
+                  <a:srgbClr val="667982"/>
+                </a:solidFill>
+                <a:highlight>
+                  <a:srgbClr val="D8DFE3"/>
+                </a:highlight>
+                <a:latin typeface="Arial" panose="020B0604020202020204" pitchFamily="34" charset="0"/>
+                <a:cs typeface="Arial" panose="020B0604020202020204" pitchFamily="34" charset="0"/>
+              </a:rPr>
+              <a:t>The function generators can be the DELTA and the two PROs</a:t>
+            </a:r>
+            <a:endParaRPr lang="LID4096" sz="1400" dirty="0">
+              <a:solidFill>
+                <a:srgbClr val="667982"/>
+              </a:solidFill>
+              <a:highlight>
+                <a:srgbClr val="D8DFE3"/>
+              </a:highlight>
+              <a:latin typeface="Arial" panose="020B0604020202020204" pitchFamily="34" charset="0"/>
+              <a:cs typeface="Arial" panose="020B0604020202020204" pitchFamily="34" charset="0"/>
+            </a:endParaRPr>
+          </a:p>
+        </p:txBody>
+      </p:sp>
     </p:spTree>
     <p:extLst>
       <p:ext uri="{BB962C8B-B14F-4D97-AF65-F5344CB8AC3E}">
@@ -10455,7 +10510,7 @@
           <a:p>
             <a:fld id="{E1CF8E31-244F-4A6A-A7D5-704B96C48AAE}" type="datetime1">
               <a:rPr lang="et-EE" smtClean="0"/>
-              <a:t>28.10.2025</a:t>
+              <a:t>04.11.2025</a:t>
             </a:fld>
             <a:endParaRPr lang="et-EE" dirty="0"/>
           </a:p>

--- a/frequency distribution.pptx
+++ b/frequency distribution.pptx
@@ -5,14 +5,18 @@
     <p:sldMasterId id="2147483708" r:id="rId1"/>
   </p:sldMasterIdLst>
   <p:notesMasterIdLst>
-    <p:notesMasterId r:id="rId7"/>
+    <p:notesMasterId r:id="rId11"/>
   </p:notesMasterIdLst>
   <p:sldIdLst>
     <p:sldId id="259" r:id="rId2"/>
     <p:sldId id="260" r:id="rId3"/>
     <p:sldId id="261" r:id="rId4"/>
     <p:sldId id="263" r:id="rId5"/>
-    <p:sldId id="262" r:id="rId6"/>
+    <p:sldId id="265" r:id="rId6"/>
+    <p:sldId id="266" r:id="rId7"/>
+    <p:sldId id="267" r:id="rId8"/>
+    <p:sldId id="264" r:id="rId9"/>
+    <p:sldId id="262" r:id="rId10"/>
   </p:sldIdLst>
   <p:sldSz cx="12192000" cy="6858000"/>
   <p:notesSz cx="6858000" cy="9144000"/>
@@ -219,7 +223,7 @@
           <a:p>
             <a:fld id="{AB81B2D2-06A2-4596-9391-656CA05E965F}" type="datetimeFigureOut">
               <a:rPr lang="et-EE" smtClean="0"/>
-              <a:t>04.11.2025</a:t>
+              <a:t>06.11.2025</a:t>
             </a:fld>
             <a:endParaRPr lang="et-EE"/>
           </a:p>
@@ -633,7 +637,7 @@
           <a:p>
             <a:fld id="{0E412FDE-1CFE-48F6-820F-9C443C301228}" type="datetime1">
               <a:rPr lang="et-EE" smtClean="0"/>
-              <a:t>04.11.2025</a:t>
+              <a:t>06.11.2025</a:t>
             </a:fld>
             <a:endParaRPr lang="et-EE" dirty="0"/>
           </a:p>
@@ -817,7 +821,7 @@
           <a:p>
             <a:fld id="{B64C0CFC-214E-42F4-8B82-CC6D451BD70F}" type="datetime1">
               <a:rPr lang="et-EE" smtClean="0"/>
-              <a:t>04.11.2025</a:t>
+              <a:t>06.11.2025</a:t>
             </a:fld>
             <a:endParaRPr lang="et-EE"/>
           </a:p>
@@ -1000,7 +1004,7 @@
           <a:p>
             <a:fld id="{5AB58BF1-41C1-47B8-ACAE-F9884B88C63A}" type="datetime1">
               <a:rPr lang="et-EE" smtClean="0"/>
-              <a:t>04.11.2025</a:t>
+              <a:t>06.11.2025</a:t>
             </a:fld>
             <a:endParaRPr lang="et-EE"/>
           </a:p>
@@ -1262,7 +1266,7 @@
           <a:p>
             <a:fld id="{E1CF8E31-244F-4A6A-A7D5-704B96C48AAE}" type="datetime1">
               <a:rPr lang="et-EE" smtClean="0"/>
-              <a:t>04.11.2025</a:t>
+              <a:t>06.11.2025</a:t>
             </a:fld>
             <a:endParaRPr lang="et-EE" dirty="0"/>
           </a:p>
@@ -1974,7 +1978,7 @@
           <a:p>
             <a:fld id="{CF92296B-3A94-4787-AA7D-8DC0AEE88FD4}" type="datetime1">
               <a:rPr lang="et-EE" smtClean="0"/>
-              <a:t>04.11.2025</a:t>
+              <a:t>06.11.2025</a:t>
             </a:fld>
             <a:endParaRPr lang="et-EE"/>
           </a:p>
@@ -2344,7 +2348,7 @@
           <a:p>
             <a:fld id="{185751C1-87AF-4EAC-9696-BB82432B7753}" type="datetime1">
               <a:rPr lang="et-EE" smtClean="0"/>
-              <a:t>04.11.2025</a:t>
+              <a:t>06.11.2025</a:t>
             </a:fld>
             <a:endParaRPr lang="et-EE"/>
           </a:p>
@@ -2442,7 +2446,7 @@
           <a:p>
             <a:fld id="{E493E3B0-4572-4FE0-8E55-6746BFAADA96}" type="datetime1">
               <a:rPr lang="et-EE" smtClean="0"/>
-              <a:t>04.11.2025</a:t>
+              <a:t>06.11.2025</a:t>
             </a:fld>
             <a:endParaRPr lang="et-EE"/>
           </a:p>
@@ -2587,7 +2591,7 @@
           <a:p>
             <a:fld id="{EE4C4D14-98D7-455C-9D0D-2863E0C0AA0D}" type="datetime1">
               <a:rPr lang="et-EE" smtClean="0"/>
-              <a:t>04.11.2025</a:t>
+              <a:t>06.11.2025</a:t>
             </a:fld>
             <a:endParaRPr lang="et-EE"/>
           </a:p>
@@ -2867,7 +2871,7 @@
           <a:p>
             <a:fld id="{94997DBE-8AE5-4A6F-9E25-F62C693D8ED5}" type="datetime1">
               <a:rPr lang="et-EE" smtClean="0"/>
-              <a:t>04.11.2025</a:t>
+              <a:t>06.11.2025</a:t>
             </a:fld>
             <a:endParaRPr lang="et-EE"/>
           </a:p>
@@ -3127,7 +3131,7 @@
           <a:p>
             <a:fld id="{DA3B51F9-97BE-4EFF-9934-D6DB8E40FF5E}" type="datetime1">
               <a:rPr lang="et-EE" smtClean="0"/>
-              <a:t>04.11.2025</a:t>
+              <a:t>06.11.2025</a:t>
             </a:fld>
             <a:endParaRPr lang="et-EE"/>
           </a:p>
@@ -3344,7 +3348,7 @@
           <a:p>
             <a:fld id="{E7C7EEDD-722C-4F14-9239-A37AD281B51F}" type="datetime1">
               <a:rPr lang="et-EE" smtClean="0"/>
-              <a:t>04.11.2025</a:t>
+              <a:t>06.11.2025</a:t>
             </a:fld>
             <a:endParaRPr lang="et-EE" dirty="0"/>
           </a:p>
@@ -3810,7 +3814,7 @@
           <a:p>
             <a:fld id="{E1CF8E31-244F-4A6A-A7D5-704B96C48AAE}" type="datetime1">
               <a:rPr lang="et-EE" smtClean="0"/>
-              <a:t>04.11.2025</a:t>
+              <a:t>06.11.2025</a:t>
             </a:fld>
             <a:endParaRPr lang="et-EE" dirty="0"/>
           </a:p>
@@ -4332,7 +4336,7 @@
           <a:p>
             <a:fld id="{E1CF8E31-244F-4A6A-A7D5-704B96C48AAE}" type="datetime1">
               <a:rPr lang="et-EE" smtClean="0"/>
-              <a:t>04.11.2025</a:t>
+              <a:t>06.11.2025</a:t>
             </a:fld>
             <a:endParaRPr lang="et-EE" dirty="0"/>
           </a:p>
@@ -5744,7 +5748,7 @@
 </file>
 
 <file path=ppt/slides/slide3.xml><?xml version="1.0" encoding="utf-8"?>
-<p:sld xmlns:a="http://schemas.openxmlformats.org/drawingml/2006/main" xmlns:r="http://schemas.openxmlformats.org/officeDocument/2006/relationships" xmlns:p="http://schemas.openxmlformats.org/presentationml/2006/main">
+<p:sld xmlns:a="http://schemas.openxmlformats.org/drawingml/2006/main" xmlns:r="http://schemas.openxmlformats.org/officeDocument/2006/relationships" xmlns:p="http://schemas.openxmlformats.org/presentationml/2006/main" show="0">
   <p:cSld>
     <p:spTree>
       <p:nvGrpSpPr>
@@ -5910,7 +5914,7 @@
           <a:p>
             <a:fld id="{E1CF8E31-244F-4A6A-A7D5-704B96C48AAE}" type="datetime1">
               <a:rPr lang="et-EE" smtClean="0"/>
-              <a:t>04.11.2025</a:t>
+              <a:t>06.11.2025</a:t>
             </a:fld>
             <a:endParaRPr lang="et-EE" dirty="0"/>
           </a:p>
@@ -9262,7 +9266,7 @@
           <a:p>
             <a:fld id="{E1CF8E31-244F-4A6A-A7D5-704B96C48AAE}" type="datetime1">
               <a:rPr lang="et-EE" smtClean="0"/>
-              <a:t>04.11.2025</a:t>
+              <a:t>06.11.2025</a:t>
             </a:fld>
             <a:endParaRPr lang="et-EE" dirty="0"/>
           </a:p>
@@ -9890,6 +9894,1908 @@
           </a:p>
         </p:txBody>
       </p:sp>
+      <p:cxnSp>
+        <p:nvCxnSpPr>
+          <p:cNvPr id="11" name="Straight Connector 10">
+            <a:extLst>
+              <a:ext uri="{FF2B5EF4-FFF2-40B4-BE49-F238E27FC236}">
+                <a16:creationId xmlns:a16="http://schemas.microsoft.com/office/drawing/2014/main" id="{8D079494-969C-42B3-AB1A-D7E3A167C5B3}"/>
+              </a:ext>
+            </a:extLst>
+          </p:cNvPr>
+          <p:cNvCxnSpPr>
+            <a:cxnSpLocks/>
+            <a:stCxn id="8" idx="3"/>
+          </p:cNvCxnSpPr>
+          <p:nvPr/>
+        </p:nvCxnSpPr>
+        <p:spPr>
+          <a:xfrm flipV="1">
+            <a:off x="2113608" y="3704016"/>
+            <a:ext cx="8989157" cy="35984"/>
+          </a:xfrm>
+          <a:prstGeom prst="line">
+            <a:avLst/>
+          </a:prstGeom>
+          <a:ln w="9525" cap="flat" cmpd="sng" algn="ctr">
+            <a:solidFill>
+              <a:schemeClr val="dk1"/>
+            </a:solidFill>
+            <a:prstDash val="dash"/>
+            <a:round/>
+            <a:headEnd type="none" w="med" len="med"/>
+            <a:tailEnd type="none" w="med" len="med"/>
+          </a:ln>
+        </p:spPr>
+        <p:style>
+          <a:lnRef idx="0">
+            <a:scrgbClr r="0" g="0" b="0"/>
+          </a:lnRef>
+          <a:fillRef idx="0">
+            <a:scrgbClr r="0" g="0" b="0"/>
+          </a:fillRef>
+          <a:effectRef idx="0">
+            <a:scrgbClr r="0" g="0" b="0"/>
+          </a:effectRef>
+          <a:fontRef idx="minor">
+            <a:schemeClr val="tx1"/>
+          </a:fontRef>
+        </p:style>
+      </p:cxnSp>
+    </p:spTree>
+    <p:extLst>
+      <p:ext uri="{BB962C8B-B14F-4D97-AF65-F5344CB8AC3E}">
+        <p14:creationId xmlns:p14="http://schemas.microsoft.com/office/powerpoint/2010/main" val="3391226487"/>
+      </p:ext>
+    </p:extLst>
+  </p:cSld>
+  <p:clrMapOvr>
+    <a:masterClrMapping/>
+  </p:clrMapOvr>
+</p:sld>
+</file>
+
+<file path=ppt/slides/slide5.xml><?xml version="1.0" encoding="utf-8"?>
+<p:sld xmlns:a="http://schemas.openxmlformats.org/drawingml/2006/main" xmlns:r="http://schemas.openxmlformats.org/officeDocument/2006/relationships" xmlns:p="http://schemas.openxmlformats.org/presentationml/2006/main">
+  <p:cSld>
+    <p:spTree>
+      <p:nvGrpSpPr>
+        <p:cNvPr id="1" name=""/>
+        <p:cNvGrpSpPr/>
+        <p:nvPr/>
+      </p:nvGrpSpPr>
+      <p:grpSpPr>
+        <a:xfrm>
+          <a:off x="0" y="0"/>
+          <a:ext cx="0" cy="0"/>
+          <a:chOff x="0" y="0"/>
+          <a:chExt cx="0" cy="0"/>
+        </a:xfrm>
+      </p:grpSpPr>
+      <p:sp>
+        <p:nvSpPr>
+          <p:cNvPr id="4" name="Date Placeholder 3">
+            <a:extLst>
+              <a:ext uri="{FF2B5EF4-FFF2-40B4-BE49-F238E27FC236}">
+                <a16:creationId xmlns:a16="http://schemas.microsoft.com/office/drawing/2014/main" id="{AC47495C-E889-C33D-FE6E-36B6F145DA4A}"/>
+              </a:ext>
+            </a:extLst>
+          </p:cNvPr>
+          <p:cNvSpPr>
+            <a:spLocks noGrp="1"/>
+          </p:cNvSpPr>
+          <p:nvPr>
+            <p:ph type="dt" sz="half" idx="10"/>
+          </p:nvPr>
+        </p:nvSpPr>
+        <p:spPr/>
+        <p:txBody>
+          <a:bodyPr/>
+          <a:lstStyle/>
+          <a:p>
+            <a:fld id="{E1CF8E31-244F-4A6A-A7D5-704B96C48AAE}" type="datetime1">
+              <a:rPr lang="et-EE" smtClean="0"/>
+              <a:t>07.11.2025</a:t>
+            </a:fld>
+            <a:endParaRPr lang="et-EE" dirty="0"/>
+          </a:p>
+        </p:txBody>
+      </p:sp>
+      <p:sp>
+        <p:nvSpPr>
+          <p:cNvPr id="5" name="Footer Placeholder 4">
+            <a:extLst>
+              <a:ext uri="{FF2B5EF4-FFF2-40B4-BE49-F238E27FC236}">
+                <a16:creationId xmlns:a16="http://schemas.microsoft.com/office/drawing/2014/main" id="{9A911491-8DAC-F9A2-DD6D-F3D5F8975CA8}"/>
+              </a:ext>
+            </a:extLst>
+          </p:cNvPr>
+          <p:cNvSpPr>
+            <a:spLocks noGrp="1"/>
+          </p:cNvSpPr>
+          <p:nvPr>
+            <p:ph type="ftr" sz="quarter" idx="11"/>
+          </p:nvPr>
+        </p:nvSpPr>
+        <p:spPr/>
+        <p:txBody>
+          <a:bodyPr/>
+          <a:lstStyle/>
+          <a:p>
+            <a:r>
+              <a:rPr lang="et-EE"/>
+              <a:t>Weekly</a:t>
+            </a:r>
+          </a:p>
+        </p:txBody>
+      </p:sp>
+      <p:sp>
+        <p:nvSpPr>
+          <p:cNvPr id="6" name="Slide Number Placeholder 5">
+            <a:extLst>
+              <a:ext uri="{FF2B5EF4-FFF2-40B4-BE49-F238E27FC236}">
+                <a16:creationId xmlns:a16="http://schemas.microsoft.com/office/drawing/2014/main" id="{CE74FE2A-033C-64DD-0F86-2505B65403BE}"/>
+              </a:ext>
+            </a:extLst>
+          </p:cNvPr>
+          <p:cNvSpPr>
+            <a:spLocks noGrp="1"/>
+          </p:cNvSpPr>
+          <p:nvPr>
+            <p:ph type="sldNum" sz="quarter" idx="12"/>
+          </p:nvPr>
+        </p:nvSpPr>
+        <p:spPr/>
+        <p:txBody>
+          <a:bodyPr/>
+          <a:lstStyle/>
+          <a:p>
+            <a:fld id="{9F39E346-B1F3-4075-BD67-234EF0F10AC6}" type="slidenum">
+              <a:rPr lang="et-EE" smtClean="0"/>
+              <a:pPr/>
+              <a:t>5</a:t>
+            </a:fld>
+            <a:endParaRPr lang="et-EE" dirty="0"/>
+          </a:p>
+        </p:txBody>
+      </p:sp>
+      <p:pic>
+        <p:nvPicPr>
+          <p:cNvPr id="10" name="Picture 9" descr="A screenshot of a computer&#10;&#10;AI-generated content may be incorrect.">
+            <a:extLst>
+              <a:ext uri="{FF2B5EF4-FFF2-40B4-BE49-F238E27FC236}">
+                <a16:creationId xmlns:a16="http://schemas.microsoft.com/office/drawing/2014/main" id="{2BF79BB5-2E66-2259-F09B-BE2781DE5FFC}"/>
+              </a:ext>
+            </a:extLst>
+          </p:cNvPr>
+          <p:cNvPicPr>
+            <a:picLocks noChangeAspect="1"/>
+          </p:cNvPicPr>
+          <p:nvPr/>
+        </p:nvPicPr>
+        <p:blipFill>
+          <a:blip r:embed="rId2"/>
+          <a:stretch>
+            <a:fillRect/>
+          </a:stretch>
+        </p:blipFill>
+        <p:spPr>
+          <a:xfrm>
+            <a:off x="-244795" y="88034"/>
+            <a:ext cx="11933444" cy="6858000"/>
+          </a:xfrm>
+          <a:prstGeom prst="rect">
+            <a:avLst/>
+          </a:prstGeom>
+        </p:spPr>
+      </p:pic>
+    </p:spTree>
+    <p:extLst>
+      <p:ext uri="{BB962C8B-B14F-4D97-AF65-F5344CB8AC3E}">
+        <p14:creationId xmlns:p14="http://schemas.microsoft.com/office/powerpoint/2010/main" val="3996729547"/>
+      </p:ext>
+    </p:extLst>
+  </p:cSld>
+  <p:clrMapOvr>
+    <a:masterClrMapping/>
+  </p:clrMapOvr>
+</p:sld>
+</file>
+
+<file path=ppt/slides/slide6.xml><?xml version="1.0" encoding="utf-8"?>
+<p:sld xmlns:a="http://schemas.openxmlformats.org/drawingml/2006/main" xmlns:r="http://schemas.openxmlformats.org/officeDocument/2006/relationships" xmlns:p="http://schemas.openxmlformats.org/presentationml/2006/main">
+  <p:cSld>
+    <p:spTree>
+      <p:nvGrpSpPr>
+        <p:cNvPr id="1" name="">
+          <a:extLst>
+            <a:ext uri="{FF2B5EF4-FFF2-40B4-BE49-F238E27FC236}">
+              <a16:creationId xmlns:a16="http://schemas.microsoft.com/office/drawing/2014/main" id="{BE69F320-70E3-A2C2-2E3C-321FDCA36E12}"/>
+            </a:ext>
+          </a:extLst>
+        </p:cNvPr>
+        <p:cNvGrpSpPr/>
+        <p:nvPr/>
+      </p:nvGrpSpPr>
+      <p:grpSpPr>
+        <a:xfrm>
+          <a:off x="0" y="0"/>
+          <a:ext cx="0" cy="0"/>
+          <a:chOff x="0" y="0"/>
+          <a:chExt cx="0" cy="0"/>
+        </a:xfrm>
+      </p:grpSpPr>
+      <p:sp>
+        <p:nvSpPr>
+          <p:cNvPr id="4" name="Date Placeholder 3">
+            <a:extLst>
+              <a:ext uri="{FF2B5EF4-FFF2-40B4-BE49-F238E27FC236}">
+                <a16:creationId xmlns:a16="http://schemas.microsoft.com/office/drawing/2014/main" id="{358A452A-92A1-FCC0-8693-F01395C8B9AA}"/>
+              </a:ext>
+            </a:extLst>
+          </p:cNvPr>
+          <p:cNvSpPr>
+            <a:spLocks noGrp="1"/>
+          </p:cNvSpPr>
+          <p:nvPr>
+            <p:ph type="dt" sz="half" idx="10"/>
+          </p:nvPr>
+        </p:nvSpPr>
+        <p:spPr/>
+        <p:txBody>
+          <a:bodyPr/>
+          <a:lstStyle/>
+          <a:p>
+            <a:fld id="{E1CF8E31-244F-4A6A-A7D5-704B96C48AAE}" type="datetime1">
+              <a:rPr lang="et-EE" smtClean="0"/>
+              <a:t>07.11.2025</a:t>
+            </a:fld>
+            <a:endParaRPr lang="et-EE" dirty="0"/>
+          </a:p>
+        </p:txBody>
+      </p:sp>
+      <p:sp>
+        <p:nvSpPr>
+          <p:cNvPr id="5" name="Footer Placeholder 4">
+            <a:extLst>
+              <a:ext uri="{FF2B5EF4-FFF2-40B4-BE49-F238E27FC236}">
+                <a16:creationId xmlns:a16="http://schemas.microsoft.com/office/drawing/2014/main" id="{6C510A4E-B94C-4AEB-B8A8-87813803A830}"/>
+              </a:ext>
+            </a:extLst>
+          </p:cNvPr>
+          <p:cNvSpPr>
+            <a:spLocks noGrp="1"/>
+          </p:cNvSpPr>
+          <p:nvPr>
+            <p:ph type="ftr" sz="quarter" idx="11"/>
+          </p:nvPr>
+        </p:nvSpPr>
+        <p:spPr/>
+        <p:txBody>
+          <a:bodyPr/>
+          <a:lstStyle/>
+          <a:p>
+            <a:r>
+              <a:rPr lang="et-EE"/>
+              <a:t>Weekly</a:t>
+            </a:r>
+          </a:p>
+        </p:txBody>
+      </p:sp>
+      <p:sp>
+        <p:nvSpPr>
+          <p:cNvPr id="6" name="Slide Number Placeholder 5">
+            <a:extLst>
+              <a:ext uri="{FF2B5EF4-FFF2-40B4-BE49-F238E27FC236}">
+                <a16:creationId xmlns:a16="http://schemas.microsoft.com/office/drawing/2014/main" id="{7EC4D3B1-EADB-E674-5FAF-1DD677EFA08D}"/>
+              </a:ext>
+            </a:extLst>
+          </p:cNvPr>
+          <p:cNvSpPr>
+            <a:spLocks noGrp="1"/>
+          </p:cNvSpPr>
+          <p:nvPr>
+            <p:ph type="sldNum" sz="quarter" idx="12"/>
+          </p:nvPr>
+        </p:nvSpPr>
+        <p:spPr/>
+        <p:txBody>
+          <a:bodyPr/>
+          <a:lstStyle/>
+          <a:p>
+            <a:fld id="{9F39E346-B1F3-4075-BD67-234EF0F10AC6}" type="slidenum">
+              <a:rPr lang="et-EE" smtClean="0"/>
+              <a:pPr/>
+              <a:t>6</a:t>
+            </a:fld>
+            <a:endParaRPr lang="et-EE" dirty="0"/>
+          </a:p>
+        </p:txBody>
+      </p:sp>
+      <p:pic>
+        <p:nvPicPr>
+          <p:cNvPr id="10" name="Picture 9" descr="A screenshot of a computer&#10;&#10;AI-generated content may be incorrect.">
+            <a:extLst>
+              <a:ext uri="{FF2B5EF4-FFF2-40B4-BE49-F238E27FC236}">
+                <a16:creationId xmlns:a16="http://schemas.microsoft.com/office/drawing/2014/main" id="{6AD63652-646E-6B2B-A4A8-C79B739411AA}"/>
+              </a:ext>
+            </a:extLst>
+          </p:cNvPr>
+          <p:cNvPicPr>
+            <a:picLocks noChangeAspect="1"/>
+          </p:cNvPicPr>
+          <p:nvPr/>
+        </p:nvPicPr>
+        <p:blipFill>
+          <a:blip r:embed="rId2"/>
+          <a:stretch>
+            <a:fillRect/>
+          </a:stretch>
+        </p:blipFill>
+        <p:spPr>
+          <a:xfrm>
+            <a:off x="-244795" y="88034"/>
+            <a:ext cx="11933444" cy="6858000"/>
+          </a:xfrm>
+          <a:prstGeom prst="rect">
+            <a:avLst/>
+          </a:prstGeom>
+        </p:spPr>
+      </p:pic>
+      <p:sp>
+        <p:nvSpPr>
+          <p:cNvPr id="2" name="Rectangle 1">
+            <a:extLst>
+              <a:ext uri="{FF2B5EF4-FFF2-40B4-BE49-F238E27FC236}">
+                <a16:creationId xmlns:a16="http://schemas.microsoft.com/office/drawing/2014/main" id="{15E68E50-EFAD-1FA4-1011-50DCABD3627F}"/>
+              </a:ext>
+            </a:extLst>
+          </p:cNvPr>
+          <p:cNvSpPr/>
+          <p:nvPr/>
+        </p:nvSpPr>
+        <p:spPr>
+          <a:xfrm>
+            <a:off x="2576515" y="616527"/>
+            <a:ext cx="1344321" cy="1835728"/>
+          </a:xfrm>
+          <a:prstGeom prst="rect">
+            <a:avLst/>
+          </a:prstGeom>
+          <a:noFill/>
+          <a:ln w="57150">
+            <a:solidFill>
+              <a:srgbClr val="C00000"/>
+            </a:solidFill>
+          </a:ln>
+        </p:spPr>
+        <p:style>
+          <a:lnRef idx="2">
+            <a:schemeClr val="accent1">
+              <a:shade val="15000"/>
+            </a:schemeClr>
+          </a:lnRef>
+          <a:fillRef idx="1">
+            <a:schemeClr val="accent1"/>
+          </a:fillRef>
+          <a:effectRef idx="0">
+            <a:schemeClr val="accent1"/>
+          </a:effectRef>
+          <a:fontRef idx="minor">
+            <a:schemeClr val="lt1"/>
+          </a:fontRef>
+        </p:style>
+        <p:txBody>
+          <a:bodyPr rtlCol="0" anchor="ctr"/>
+          <a:lstStyle/>
+          <a:p>
+            <a:pPr algn="ctr"/>
+            <a:endParaRPr lang="et-EE"/>
+          </a:p>
+        </p:txBody>
+      </p:sp>
+    </p:spTree>
+    <p:extLst>
+      <p:ext uri="{BB962C8B-B14F-4D97-AF65-F5344CB8AC3E}">
+        <p14:creationId xmlns:p14="http://schemas.microsoft.com/office/powerpoint/2010/main" val="704177680"/>
+      </p:ext>
+    </p:extLst>
+  </p:cSld>
+  <p:clrMapOvr>
+    <a:masterClrMapping/>
+  </p:clrMapOvr>
+</p:sld>
+</file>
+
+<file path=ppt/slides/slide7.xml><?xml version="1.0" encoding="utf-8"?>
+<p:sld xmlns:a="http://schemas.openxmlformats.org/drawingml/2006/main" xmlns:r="http://schemas.openxmlformats.org/officeDocument/2006/relationships" xmlns:p="http://schemas.openxmlformats.org/presentationml/2006/main">
+  <p:cSld>
+    <p:spTree>
+      <p:nvGrpSpPr>
+        <p:cNvPr id="1" name=""/>
+        <p:cNvGrpSpPr/>
+        <p:nvPr/>
+      </p:nvGrpSpPr>
+      <p:grpSpPr>
+        <a:xfrm>
+          <a:off x="0" y="0"/>
+          <a:ext cx="0" cy="0"/>
+          <a:chOff x="0" y="0"/>
+          <a:chExt cx="0" cy="0"/>
+        </a:xfrm>
+      </p:grpSpPr>
+      <p:sp>
+        <p:nvSpPr>
+          <p:cNvPr id="2" name="Title 1">
+            <a:extLst>
+              <a:ext uri="{FF2B5EF4-FFF2-40B4-BE49-F238E27FC236}">
+                <a16:creationId xmlns:a16="http://schemas.microsoft.com/office/drawing/2014/main" id="{2563AC39-4D13-C598-E7F2-713DBDF2FAF3}"/>
+              </a:ext>
+            </a:extLst>
+          </p:cNvPr>
+          <p:cNvSpPr>
+            <a:spLocks noGrp="1"/>
+          </p:cNvSpPr>
+          <p:nvPr>
+            <p:ph type="title"/>
+          </p:nvPr>
+        </p:nvSpPr>
+        <p:spPr/>
+        <p:txBody>
+          <a:bodyPr/>
+          <a:lstStyle/>
+          <a:p>
+            <a:endParaRPr lang="et-EE" dirty="0"/>
+          </a:p>
+        </p:txBody>
+      </p:sp>
+      <p:graphicFrame>
+        <p:nvGraphicFramePr>
+          <p:cNvPr id="8" name="Content Placeholder 7">
+            <a:extLst>
+              <a:ext uri="{FF2B5EF4-FFF2-40B4-BE49-F238E27FC236}">
+                <a16:creationId xmlns:a16="http://schemas.microsoft.com/office/drawing/2014/main" id="{BAE43A56-8151-8C49-1D5C-B4A9BF584C6B}"/>
+              </a:ext>
+            </a:extLst>
+          </p:cNvPr>
+          <p:cNvGraphicFramePr>
+            <a:graphicFrameLocks noGrp="1"/>
+          </p:cNvGraphicFramePr>
+          <p:nvPr>
+            <p:ph idx="1"/>
+            <p:extLst>
+              <p:ext uri="{D42A27DB-BD31-4B8C-83A1-F6EECF244321}">
+                <p14:modId xmlns:p14="http://schemas.microsoft.com/office/powerpoint/2010/main" val="3934800294"/>
+              </p:ext>
+            </p:extLst>
+          </p:nvPr>
+        </p:nvGraphicFramePr>
+        <p:xfrm>
+          <a:off x="431656" y="2255703"/>
+          <a:ext cx="10515597" cy="2225040"/>
+        </p:xfrm>
+        <a:graphic>
+          <a:graphicData uri="http://schemas.openxmlformats.org/drawingml/2006/table">
+            <a:tbl>
+              <a:tblPr firstRow="1" bandRow="1">
+                <a:tableStyleId>{073A0DAA-6AF3-43AB-8588-CEC1D06C72B9}</a:tableStyleId>
+              </a:tblPr>
+              <a:tblGrid>
+                <a:gridCol w="4299671">
+                  <a:extLst>
+                    <a:ext uri="{9D8B030D-6E8A-4147-A177-3AD203B41FA5}">
+                      <a16:colId xmlns:a16="http://schemas.microsoft.com/office/drawing/2014/main" val="4192847850"/>
+                    </a:ext>
+                  </a:extLst>
+                </a:gridCol>
+                <a:gridCol w="2710727">
+                  <a:extLst>
+                    <a:ext uri="{9D8B030D-6E8A-4147-A177-3AD203B41FA5}">
+                      <a16:colId xmlns:a16="http://schemas.microsoft.com/office/drawing/2014/main" val="2079409503"/>
+                    </a:ext>
+                  </a:extLst>
+                </a:gridCol>
+                <a:gridCol w="3505199">
+                  <a:extLst>
+                    <a:ext uri="{9D8B030D-6E8A-4147-A177-3AD203B41FA5}">
+                      <a16:colId xmlns:a16="http://schemas.microsoft.com/office/drawing/2014/main" val="516013698"/>
+                    </a:ext>
+                  </a:extLst>
+                </a:gridCol>
+              </a:tblGrid>
+              <a:tr h="370840">
+                <a:tc>
+                  <a:txBody>
+                    <a:bodyPr/>
+                    <a:lstStyle/>
+                    <a:p>
+                      <a:r>
+                        <a:rPr lang="en-US" dirty="0">
+                          <a:latin typeface="Arial" panose="020B0604020202020204" pitchFamily="34" charset="0"/>
+                          <a:cs typeface="Arial" panose="020B0604020202020204" pitchFamily="34" charset="0"/>
+                        </a:rPr>
+                        <a:t>Purpose</a:t>
+                      </a:r>
+                      <a:endParaRPr lang="et-EE" dirty="0">
+                        <a:latin typeface="Arial" panose="020B0604020202020204" pitchFamily="34" charset="0"/>
+                        <a:cs typeface="Arial" panose="020B0604020202020204" pitchFamily="34" charset="0"/>
+                      </a:endParaRPr>
+                    </a:p>
+                  </a:txBody>
+                  <a:tcPr/>
+                </a:tc>
+                <a:tc>
+                  <a:txBody>
+                    <a:bodyPr/>
+                    <a:lstStyle/>
+                    <a:p>
+                      <a:r>
+                        <a:rPr lang="en-US" dirty="0">
+                          <a:latin typeface="Arial" panose="020B0604020202020204" pitchFamily="34" charset="0"/>
+                          <a:cs typeface="Arial" panose="020B0604020202020204" pitchFamily="34" charset="0"/>
+                        </a:rPr>
+                        <a:t># of channels</a:t>
+                      </a:r>
+                      <a:endParaRPr lang="et-EE" dirty="0">
+                        <a:latin typeface="Arial" panose="020B0604020202020204" pitchFamily="34" charset="0"/>
+                        <a:cs typeface="Arial" panose="020B0604020202020204" pitchFamily="34" charset="0"/>
+                      </a:endParaRPr>
+                    </a:p>
+                  </a:txBody>
+                  <a:tcPr/>
+                </a:tc>
+                <a:tc>
+                  <a:txBody>
+                    <a:bodyPr/>
+                    <a:lstStyle/>
+                    <a:p>
+                      <a:endParaRPr lang="et-EE" dirty="0">
+                        <a:latin typeface="Arial" panose="020B0604020202020204" pitchFamily="34" charset="0"/>
+                        <a:cs typeface="Arial" panose="020B0604020202020204" pitchFamily="34" charset="0"/>
+                      </a:endParaRPr>
+                    </a:p>
+                  </a:txBody>
+                  <a:tcPr/>
+                </a:tc>
+                <a:extLst>
+                  <a:ext uri="{0D108BD9-81ED-4DB2-BD59-A6C34878D82A}">
+                    <a16:rowId xmlns:a16="http://schemas.microsoft.com/office/drawing/2014/main" val="1208199886"/>
+                  </a:ext>
+                </a:extLst>
+              </a:tr>
+              <a:tr h="370840">
+                <a:tc>
+                  <a:txBody>
+                    <a:bodyPr/>
+                    <a:lstStyle/>
+                    <a:p>
+                      <a:r>
+                        <a:rPr lang="en-US" dirty="0">
+                          <a:latin typeface="Arial" panose="020B0604020202020204" pitchFamily="34" charset="0"/>
+                          <a:cs typeface="Arial" panose="020B0604020202020204" pitchFamily="34" charset="0"/>
+                        </a:rPr>
+                        <a:t>PDH laser controls (Laser 1, Ref)</a:t>
+                      </a:r>
+                      <a:endParaRPr lang="et-EE" dirty="0">
+                        <a:latin typeface="Arial" panose="020B0604020202020204" pitchFamily="34" charset="0"/>
+                        <a:cs typeface="Arial" panose="020B0604020202020204" pitchFamily="34" charset="0"/>
+                      </a:endParaRPr>
+                    </a:p>
+                  </a:txBody>
+                  <a:tcPr/>
+                </a:tc>
+                <a:tc>
+                  <a:txBody>
+                    <a:bodyPr/>
+                    <a:lstStyle/>
+                    <a:p>
+                      <a:r>
+                        <a:rPr lang="en-US" dirty="0">
+                          <a:latin typeface="Arial" panose="020B0604020202020204" pitchFamily="34" charset="0"/>
+                          <a:cs typeface="Arial" panose="020B0604020202020204" pitchFamily="34" charset="0"/>
+                        </a:rPr>
+                        <a:t>4</a:t>
+                      </a:r>
+                      <a:endParaRPr lang="et-EE" dirty="0">
+                        <a:latin typeface="Arial" panose="020B0604020202020204" pitchFamily="34" charset="0"/>
+                        <a:cs typeface="Arial" panose="020B0604020202020204" pitchFamily="34" charset="0"/>
+                      </a:endParaRPr>
+                    </a:p>
+                  </a:txBody>
+                  <a:tcPr/>
+                </a:tc>
+                <a:tc>
+                  <a:txBody>
+                    <a:bodyPr/>
+                    <a:lstStyle/>
+                    <a:p>
+                      <a:r>
+                        <a:rPr lang="en-US" dirty="0">
+                          <a:latin typeface="Arial" panose="020B0604020202020204" pitchFamily="34" charset="0"/>
+                          <a:cs typeface="Arial" panose="020B0604020202020204" pitchFamily="34" charset="0"/>
+                        </a:rPr>
+                        <a:t>Delta (4)</a:t>
+                      </a:r>
+                      <a:endParaRPr lang="et-EE" dirty="0">
+                        <a:latin typeface="Arial" panose="020B0604020202020204" pitchFamily="34" charset="0"/>
+                        <a:cs typeface="Arial" panose="020B0604020202020204" pitchFamily="34" charset="0"/>
+                      </a:endParaRPr>
+                    </a:p>
+                  </a:txBody>
+                  <a:tcPr/>
+                </a:tc>
+                <a:extLst>
+                  <a:ext uri="{0D108BD9-81ED-4DB2-BD59-A6C34878D82A}">
+                    <a16:rowId xmlns:a16="http://schemas.microsoft.com/office/drawing/2014/main" val="559083696"/>
+                  </a:ext>
+                </a:extLst>
+              </a:tr>
+              <a:tr h="370840">
+                <a:tc>
+                  <a:txBody>
+                    <a:bodyPr/>
+                    <a:lstStyle/>
+                    <a:p>
+                      <a:r>
+                        <a:rPr lang="en-US" dirty="0">
+                          <a:latin typeface="Arial" panose="020B0604020202020204" pitchFamily="34" charset="0"/>
+                          <a:cs typeface="Arial" panose="020B0604020202020204" pitchFamily="34" charset="0"/>
+                        </a:rPr>
+                        <a:t>Sideband modulation (o(10MHz))</a:t>
+                      </a:r>
+                      <a:endParaRPr lang="et-EE" dirty="0">
+                        <a:latin typeface="Arial" panose="020B0604020202020204" pitchFamily="34" charset="0"/>
+                        <a:cs typeface="Arial" panose="020B0604020202020204" pitchFamily="34" charset="0"/>
+                      </a:endParaRPr>
+                    </a:p>
+                  </a:txBody>
+                  <a:tcPr/>
+                </a:tc>
+                <a:tc>
+                  <a:txBody>
+                    <a:bodyPr/>
+                    <a:lstStyle/>
+                    <a:p>
+                      <a:r>
+                        <a:rPr lang="en-US" dirty="0">
+                          <a:latin typeface="Arial" panose="020B0604020202020204" pitchFamily="34" charset="0"/>
+                          <a:cs typeface="Arial" panose="020B0604020202020204" pitchFamily="34" charset="0"/>
+                        </a:rPr>
+                        <a:t>3</a:t>
+                      </a:r>
+                      <a:endParaRPr lang="et-EE" dirty="0">
+                        <a:latin typeface="Arial" panose="020B0604020202020204" pitchFamily="34" charset="0"/>
+                        <a:cs typeface="Arial" panose="020B0604020202020204" pitchFamily="34" charset="0"/>
+                      </a:endParaRPr>
+                    </a:p>
+                  </a:txBody>
+                  <a:tcPr/>
+                </a:tc>
+                <a:tc>
+                  <a:txBody>
+                    <a:bodyPr/>
+                    <a:lstStyle/>
+                    <a:p>
+                      <a:r>
+                        <a:rPr lang="en-US" dirty="0">
+                          <a:latin typeface="Arial" panose="020B0604020202020204" pitchFamily="34" charset="0"/>
+                          <a:cs typeface="Arial" panose="020B0604020202020204" pitchFamily="34" charset="0"/>
+                        </a:rPr>
+                        <a:t>Delta (1), Pro (2)</a:t>
+                      </a:r>
+                      <a:endParaRPr lang="et-EE" dirty="0">
+                        <a:latin typeface="Arial" panose="020B0604020202020204" pitchFamily="34" charset="0"/>
+                        <a:cs typeface="Arial" panose="020B0604020202020204" pitchFamily="34" charset="0"/>
+                      </a:endParaRPr>
+                    </a:p>
+                  </a:txBody>
+                  <a:tcPr/>
+                </a:tc>
+                <a:extLst>
+                  <a:ext uri="{0D108BD9-81ED-4DB2-BD59-A6C34878D82A}">
+                    <a16:rowId xmlns:a16="http://schemas.microsoft.com/office/drawing/2014/main" val="3326256294"/>
+                  </a:ext>
+                </a:extLst>
+              </a:tr>
+              <a:tr h="370840">
+                <a:tc>
+                  <a:txBody>
+                    <a:bodyPr/>
+                    <a:lstStyle/>
+                    <a:p>
+                      <a:r>
+                        <a:rPr lang="en-US" dirty="0">
+                          <a:latin typeface="Arial" panose="020B0604020202020204" pitchFamily="34" charset="0"/>
+                          <a:cs typeface="Arial" panose="020B0604020202020204" pitchFamily="34" charset="0"/>
+                        </a:rPr>
+                        <a:t>Phasemeter sampling clock (80 MHz)</a:t>
+                      </a:r>
+                      <a:endParaRPr lang="et-EE" dirty="0">
+                        <a:latin typeface="Arial" panose="020B0604020202020204" pitchFamily="34" charset="0"/>
+                        <a:cs typeface="Arial" panose="020B0604020202020204" pitchFamily="34" charset="0"/>
+                      </a:endParaRPr>
+                    </a:p>
+                  </a:txBody>
+                  <a:tcPr/>
+                </a:tc>
+                <a:tc>
+                  <a:txBody>
+                    <a:bodyPr/>
+                    <a:lstStyle/>
+                    <a:p>
+                      <a:r>
+                        <a:rPr lang="en-US" dirty="0">
+                          <a:latin typeface="Arial" panose="020B0604020202020204" pitchFamily="34" charset="0"/>
+                          <a:cs typeface="Arial" panose="020B0604020202020204" pitchFamily="34" charset="0"/>
+                        </a:rPr>
+                        <a:t>3</a:t>
+                      </a:r>
+                      <a:endParaRPr lang="et-EE" dirty="0">
+                        <a:latin typeface="Arial" panose="020B0604020202020204" pitchFamily="34" charset="0"/>
+                        <a:cs typeface="Arial" panose="020B0604020202020204" pitchFamily="34" charset="0"/>
+                      </a:endParaRPr>
+                    </a:p>
+                  </a:txBody>
+                  <a:tcPr/>
+                </a:tc>
+                <a:tc>
+                  <a:txBody>
+                    <a:bodyPr/>
+                    <a:lstStyle/>
+                    <a:p>
+                      <a:pPr marL="0" marR="0" lvl="0" indent="0" algn="l" defTabSz="914400" rtl="0" eaLnBrk="1" fontAlgn="auto" latinLnBrk="0" hangingPunct="1">
+                        <a:lnSpc>
+                          <a:spcPct val="100000"/>
+                        </a:lnSpc>
+                        <a:spcBef>
+                          <a:spcPts val="0"/>
+                        </a:spcBef>
+                        <a:spcAft>
+                          <a:spcPts val="0"/>
+                        </a:spcAft>
+                        <a:buClrTx/>
+                        <a:buSzTx/>
+                        <a:buFontTx/>
+                        <a:buNone/>
+                        <a:tabLst/>
+                        <a:defRPr/>
+                      </a:pPr>
+                      <a:r>
+                        <a:rPr lang="en-US" dirty="0">
+                          <a:latin typeface="Arial" panose="020B0604020202020204" pitchFamily="34" charset="0"/>
+                          <a:cs typeface="Arial" panose="020B0604020202020204" pitchFamily="34" charset="0"/>
+                        </a:rPr>
+                        <a:t>Delta (1), Pro (2)</a:t>
+                      </a:r>
+                      <a:endParaRPr lang="et-EE" dirty="0">
+                        <a:latin typeface="Arial" panose="020B0604020202020204" pitchFamily="34" charset="0"/>
+                        <a:cs typeface="Arial" panose="020B0604020202020204" pitchFamily="34" charset="0"/>
+                      </a:endParaRPr>
+                    </a:p>
+                  </a:txBody>
+                  <a:tcPr/>
+                </a:tc>
+                <a:extLst>
+                  <a:ext uri="{0D108BD9-81ED-4DB2-BD59-A6C34878D82A}">
+                    <a16:rowId xmlns:a16="http://schemas.microsoft.com/office/drawing/2014/main" val="3890868470"/>
+                  </a:ext>
+                </a:extLst>
+              </a:tr>
+              <a:tr h="370840">
+                <a:tc>
+                  <a:txBody>
+                    <a:bodyPr/>
+                    <a:lstStyle/>
+                    <a:p>
+                      <a:r>
+                        <a:rPr lang="en-US" dirty="0">
+                          <a:latin typeface="Arial" panose="020B0604020202020204" pitchFamily="34" charset="0"/>
+                          <a:cs typeface="Arial" panose="020B0604020202020204" pitchFamily="34" charset="0"/>
+                        </a:rPr>
+                        <a:t>Pilot tone (37.5 MHz)</a:t>
+                      </a:r>
+                      <a:endParaRPr lang="et-EE" dirty="0">
+                        <a:latin typeface="Arial" panose="020B0604020202020204" pitchFamily="34" charset="0"/>
+                        <a:cs typeface="Arial" panose="020B0604020202020204" pitchFamily="34" charset="0"/>
+                      </a:endParaRPr>
+                    </a:p>
+                  </a:txBody>
+                  <a:tcPr/>
+                </a:tc>
+                <a:tc>
+                  <a:txBody>
+                    <a:bodyPr/>
+                    <a:lstStyle/>
+                    <a:p>
+                      <a:r>
+                        <a:rPr lang="en-US" dirty="0">
+                          <a:latin typeface="Arial" panose="020B0604020202020204" pitchFamily="34" charset="0"/>
+                          <a:cs typeface="Arial" panose="020B0604020202020204" pitchFamily="34" charset="0"/>
+                        </a:rPr>
+                        <a:t>3 (4)</a:t>
+                      </a:r>
+                      <a:endParaRPr lang="et-EE" dirty="0">
+                        <a:latin typeface="Arial" panose="020B0604020202020204" pitchFamily="34" charset="0"/>
+                        <a:cs typeface="Arial" panose="020B0604020202020204" pitchFamily="34" charset="0"/>
+                      </a:endParaRPr>
+                    </a:p>
+                  </a:txBody>
+                  <a:tcPr/>
+                </a:tc>
+                <a:tc>
+                  <a:txBody>
+                    <a:bodyPr/>
+                    <a:lstStyle/>
+                    <a:p>
+                      <a:pPr marL="0" marR="0" lvl="0" indent="0" algn="l" defTabSz="914400" rtl="0" eaLnBrk="1" fontAlgn="auto" latinLnBrk="0" hangingPunct="1">
+                        <a:lnSpc>
+                          <a:spcPct val="100000"/>
+                        </a:lnSpc>
+                        <a:spcBef>
+                          <a:spcPts val="0"/>
+                        </a:spcBef>
+                        <a:spcAft>
+                          <a:spcPts val="0"/>
+                        </a:spcAft>
+                        <a:buClrTx/>
+                        <a:buSzTx/>
+                        <a:buFontTx/>
+                        <a:buNone/>
+                        <a:tabLst/>
+                        <a:defRPr/>
+                      </a:pPr>
+                      <a:r>
+                        <a:rPr lang="en-US" dirty="0">
+                          <a:latin typeface="Arial" panose="020B0604020202020204" pitchFamily="34" charset="0"/>
+                          <a:cs typeface="Arial" panose="020B0604020202020204" pitchFamily="34" charset="0"/>
+                        </a:rPr>
+                        <a:t>Delta (1), Pro (2)</a:t>
+                      </a:r>
+                      <a:endParaRPr lang="et-EE" dirty="0">
+                        <a:latin typeface="Arial" panose="020B0604020202020204" pitchFamily="34" charset="0"/>
+                        <a:cs typeface="Arial" panose="020B0604020202020204" pitchFamily="34" charset="0"/>
+                      </a:endParaRPr>
+                    </a:p>
+                  </a:txBody>
+                  <a:tcPr/>
+                </a:tc>
+                <a:extLst>
+                  <a:ext uri="{0D108BD9-81ED-4DB2-BD59-A6C34878D82A}">
+                    <a16:rowId xmlns:a16="http://schemas.microsoft.com/office/drawing/2014/main" val="575034111"/>
+                  </a:ext>
+                </a:extLst>
+              </a:tr>
+              <a:tr h="370840">
+                <a:tc>
+                  <a:txBody>
+                    <a:bodyPr/>
+                    <a:lstStyle/>
+                    <a:p>
+                      <a:r>
+                        <a:rPr lang="en-US" dirty="0">
+                          <a:latin typeface="Arial" panose="020B0604020202020204" pitchFamily="34" charset="0"/>
+                          <a:cs typeface="Arial" panose="020B0604020202020204" pitchFamily="34" charset="0"/>
+                        </a:rPr>
+                        <a:t>PLL laser locks</a:t>
+                      </a:r>
+                      <a:endParaRPr lang="et-EE" dirty="0">
+                        <a:latin typeface="Arial" panose="020B0604020202020204" pitchFamily="34" charset="0"/>
+                        <a:cs typeface="Arial" panose="020B0604020202020204" pitchFamily="34" charset="0"/>
+                      </a:endParaRPr>
+                    </a:p>
+                  </a:txBody>
+                  <a:tcPr/>
+                </a:tc>
+                <a:tc>
+                  <a:txBody>
+                    <a:bodyPr/>
+                    <a:lstStyle/>
+                    <a:p>
+                      <a:r>
+                        <a:rPr lang="en-US" dirty="0">
+                          <a:latin typeface="Arial" panose="020B0604020202020204" pitchFamily="34" charset="0"/>
+                          <a:cs typeface="Arial" panose="020B0604020202020204" pitchFamily="34" charset="0"/>
+                        </a:rPr>
+                        <a:t>4</a:t>
+                      </a:r>
+                      <a:endParaRPr lang="et-EE" dirty="0">
+                        <a:latin typeface="Arial" panose="020B0604020202020204" pitchFamily="34" charset="0"/>
+                        <a:cs typeface="Arial" panose="020B0604020202020204" pitchFamily="34" charset="0"/>
+                      </a:endParaRPr>
+                    </a:p>
+                  </a:txBody>
+                  <a:tcPr/>
+                </a:tc>
+                <a:tc>
+                  <a:txBody>
+                    <a:bodyPr/>
+                    <a:lstStyle/>
+                    <a:p>
+                      <a:r>
+                        <a:rPr lang="en-US" dirty="0">
+                          <a:latin typeface="Arial" panose="020B0604020202020204" pitchFamily="34" charset="0"/>
+                          <a:cs typeface="Arial" panose="020B0604020202020204" pitchFamily="34" charset="0"/>
+                        </a:rPr>
+                        <a:t>Labs (4)</a:t>
+                      </a:r>
+                      <a:endParaRPr lang="et-EE" dirty="0">
+                        <a:latin typeface="Arial" panose="020B0604020202020204" pitchFamily="34" charset="0"/>
+                        <a:cs typeface="Arial" panose="020B0604020202020204" pitchFamily="34" charset="0"/>
+                      </a:endParaRPr>
+                    </a:p>
+                  </a:txBody>
+                  <a:tcPr/>
+                </a:tc>
+                <a:extLst>
+                  <a:ext uri="{0D108BD9-81ED-4DB2-BD59-A6C34878D82A}">
+                    <a16:rowId xmlns:a16="http://schemas.microsoft.com/office/drawing/2014/main" val="3690261161"/>
+                  </a:ext>
+                </a:extLst>
+              </a:tr>
+            </a:tbl>
+          </a:graphicData>
+        </a:graphic>
+      </p:graphicFrame>
+      <p:sp>
+        <p:nvSpPr>
+          <p:cNvPr id="4" name="Date Placeholder 3">
+            <a:extLst>
+              <a:ext uri="{FF2B5EF4-FFF2-40B4-BE49-F238E27FC236}">
+                <a16:creationId xmlns:a16="http://schemas.microsoft.com/office/drawing/2014/main" id="{4621AAAD-B72B-D52F-8B1A-802461F78F22}"/>
+              </a:ext>
+            </a:extLst>
+          </p:cNvPr>
+          <p:cNvSpPr>
+            <a:spLocks noGrp="1"/>
+          </p:cNvSpPr>
+          <p:nvPr>
+            <p:ph type="dt" sz="half" idx="10"/>
+          </p:nvPr>
+        </p:nvSpPr>
+        <p:spPr/>
+        <p:txBody>
+          <a:bodyPr/>
+          <a:lstStyle/>
+          <a:p>
+            <a:fld id="{E1CF8E31-244F-4A6A-A7D5-704B96C48AAE}" type="datetime1">
+              <a:rPr lang="et-EE" smtClean="0"/>
+              <a:t>07.11.2025</a:t>
+            </a:fld>
+            <a:endParaRPr lang="et-EE" dirty="0"/>
+          </a:p>
+        </p:txBody>
+      </p:sp>
+      <p:sp>
+        <p:nvSpPr>
+          <p:cNvPr id="5" name="Footer Placeholder 4">
+            <a:extLst>
+              <a:ext uri="{FF2B5EF4-FFF2-40B4-BE49-F238E27FC236}">
+                <a16:creationId xmlns:a16="http://schemas.microsoft.com/office/drawing/2014/main" id="{C02772C1-C538-0BB2-8525-2345950A46BF}"/>
+              </a:ext>
+            </a:extLst>
+          </p:cNvPr>
+          <p:cNvSpPr>
+            <a:spLocks noGrp="1"/>
+          </p:cNvSpPr>
+          <p:nvPr>
+            <p:ph type="ftr" sz="quarter" idx="11"/>
+          </p:nvPr>
+        </p:nvSpPr>
+        <p:spPr/>
+        <p:txBody>
+          <a:bodyPr/>
+          <a:lstStyle/>
+          <a:p>
+            <a:r>
+              <a:rPr lang="et-EE"/>
+              <a:t>Weekly</a:t>
+            </a:r>
+          </a:p>
+        </p:txBody>
+      </p:sp>
+      <p:sp>
+        <p:nvSpPr>
+          <p:cNvPr id="6" name="Slide Number Placeholder 5">
+            <a:extLst>
+              <a:ext uri="{FF2B5EF4-FFF2-40B4-BE49-F238E27FC236}">
+                <a16:creationId xmlns:a16="http://schemas.microsoft.com/office/drawing/2014/main" id="{788351CC-D976-3C95-EE2A-53BDE1F9D085}"/>
+              </a:ext>
+            </a:extLst>
+          </p:cNvPr>
+          <p:cNvSpPr>
+            <a:spLocks noGrp="1"/>
+          </p:cNvSpPr>
+          <p:nvPr>
+            <p:ph type="sldNum" sz="quarter" idx="12"/>
+          </p:nvPr>
+        </p:nvSpPr>
+        <p:spPr/>
+        <p:txBody>
+          <a:bodyPr/>
+          <a:lstStyle/>
+          <a:p>
+            <a:fld id="{9F39E346-B1F3-4075-BD67-234EF0F10AC6}" type="slidenum">
+              <a:rPr lang="et-EE" smtClean="0"/>
+              <a:pPr/>
+              <a:t>7</a:t>
+            </a:fld>
+            <a:endParaRPr lang="et-EE" dirty="0"/>
+          </a:p>
+        </p:txBody>
+      </p:sp>
+      <p:sp>
+        <p:nvSpPr>
+          <p:cNvPr id="9" name="TextBox 8">
+            <a:extLst>
+              <a:ext uri="{FF2B5EF4-FFF2-40B4-BE49-F238E27FC236}">
+                <a16:creationId xmlns:a16="http://schemas.microsoft.com/office/drawing/2014/main" id="{348BA451-5BE9-FEE2-AB07-2CA808339A29}"/>
+              </a:ext>
+            </a:extLst>
+          </p:cNvPr>
+          <p:cNvSpPr txBox="1"/>
+          <p:nvPr/>
+        </p:nvSpPr>
+        <p:spPr>
+          <a:xfrm>
+            <a:off x="491836" y="1524000"/>
+            <a:ext cx="6096000" cy="584775"/>
+          </a:xfrm>
+          <a:prstGeom prst="rect">
+            <a:avLst/>
+          </a:prstGeom>
+          <a:noFill/>
+        </p:spPr>
+        <p:txBody>
+          <a:bodyPr wrap="square" rtlCol="0">
+            <a:spAutoFit/>
+          </a:bodyPr>
+          <a:lstStyle/>
+          <a:p>
+            <a:pPr algn="l"/>
+            <a:r>
+              <a:rPr lang="en-US" sz="1600" dirty="0">
+                <a:solidFill>
+                  <a:srgbClr val="667982"/>
+                </a:solidFill>
+                <a:latin typeface="Arial" panose="020B0604020202020204" pitchFamily="34" charset="0"/>
+                <a:cs typeface="Arial" panose="020B0604020202020204" pitchFamily="34" charset="0"/>
+              </a:rPr>
+              <a:t>The Moku and function generator output channels can potentially be covered with one Delta, 2 Pros and 2 Labs. (?)</a:t>
+            </a:r>
+            <a:endParaRPr lang="et-EE" sz="1600" dirty="0">
+              <a:solidFill>
+                <a:srgbClr val="667982"/>
+              </a:solidFill>
+              <a:latin typeface="Arial" panose="020B0604020202020204" pitchFamily="34" charset="0"/>
+              <a:cs typeface="Arial" panose="020B0604020202020204" pitchFamily="34" charset="0"/>
+            </a:endParaRPr>
+          </a:p>
+        </p:txBody>
+      </p:sp>
+      <p:sp>
+        <p:nvSpPr>
+          <p:cNvPr id="10" name="TextBox 9">
+            <a:extLst>
+              <a:ext uri="{FF2B5EF4-FFF2-40B4-BE49-F238E27FC236}">
+                <a16:creationId xmlns:a16="http://schemas.microsoft.com/office/drawing/2014/main" id="{536C0809-17DD-897B-F16D-F0BA37E6AB5D}"/>
+              </a:ext>
+            </a:extLst>
+          </p:cNvPr>
+          <p:cNvSpPr txBox="1"/>
+          <p:nvPr/>
+        </p:nvSpPr>
+        <p:spPr>
+          <a:xfrm>
+            <a:off x="568036" y="5021140"/>
+            <a:ext cx="6096000" cy="338554"/>
+          </a:xfrm>
+          <a:prstGeom prst="rect">
+            <a:avLst/>
+          </a:prstGeom>
+          <a:noFill/>
+        </p:spPr>
+        <p:txBody>
+          <a:bodyPr wrap="square" rtlCol="0">
+            <a:spAutoFit/>
+          </a:bodyPr>
+          <a:lstStyle/>
+          <a:p>
+            <a:pPr algn="l"/>
+            <a:r>
+              <a:rPr lang="en-US" sz="1600" dirty="0">
+                <a:solidFill>
+                  <a:srgbClr val="667982"/>
+                </a:solidFill>
+                <a:highlight>
+                  <a:srgbClr val="D8DFE3"/>
+                </a:highlight>
+                <a:latin typeface="Arial" panose="020B0604020202020204" pitchFamily="34" charset="0"/>
+                <a:cs typeface="Arial" panose="020B0604020202020204" pitchFamily="34" charset="0"/>
+              </a:rPr>
+              <a:t>But this is assuming we have the ZCU phasemeters.</a:t>
+            </a:r>
+            <a:endParaRPr lang="et-EE" sz="1600" dirty="0">
+              <a:solidFill>
+                <a:srgbClr val="667982"/>
+              </a:solidFill>
+              <a:highlight>
+                <a:srgbClr val="D8DFE3"/>
+              </a:highlight>
+              <a:latin typeface="Arial" panose="020B0604020202020204" pitchFamily="34" charset="0"/>
+              <a:cs typeface="Arial" panose="020B0604020202020204" pitchFamily="34" charset="0"/>
+            </a:endParaRPr>
+          </a:p>
+        </p:txBody>
+      </p:sp>
+    </p:spTree>
+    <p:extLst>
+      <p:ext uri="{BB962C8B-B14F-4D97-AF65-F5344CB8AC3E}">
+        <p14:creationId xmlns:p14="http://schemas.microsoft.com/office/powerpoint/2010/main" val="377935920"/>
+      </p:ext>
+    </p:extLst>
+  </p:cSld>
+  <p:clrMapOvr>
+    <a:masterClrMapping/>
+  </p:clrMapOvr>
+</p:sld>
+</file>
+
+<file path=ppt/slides/slide8.xml><?xml version="1.0" encoding="utf-8"?>
+<p:sld xmlns:a="http://schemas.openxmlformats.org/drawingml/2006/main" xmlns:r="http://schemas.openxmlformats.org/officeDocument/2006/relationships" xmlns:p="http://schemas.openxmlformats.org/presentationml/2006/main" show="0">
+  <p:cSld>
+    <p:spTree>
+      <p:nvGrpSpPr>
+        <p:cNvPr id="1" name="">
+          <a:extLst>
+            <a:ext uri="{FF2B5EF4-FFF2-40B4-BE49-F238E27FC236}">
+              <a16:creationId xmlns:a16="http://schemas.microsoft.com/office/drawing/2014/main" id="{7F987110-6B25-1DAC-D816-85BEF36115A8}"/>
+            </a:ext>
+          </a:extLst>
+        </p:cNvPr>
+        <p:cNvGrpSpPr/>
+        <p:nvPr/>
+      </p:nvGrpSpPr>
+      <p:grpSpPr>
+        <a:xfrm>
+          <a:off x="0" y="0"/>
+          <a:ext cx="0" cy="0"/>
+          <a:chOff x="0" y="0"/>
+          <a:chExt cx="0" cy="0"/>
+        </a:xfrm>
+      </p:grpSpPr>
+      <p:sp>
+        <p:nvSpPr>
+          <p:cNvPr id="24" name="Rectangle 23">
+            <a:extLst>
+              <a:ext uri="{FF2B5EF4-FFF2-40B4-BE49-F238E27FC236}">
+                <a16:creationId xmlns:a16="http://schemas.microsoft.com/office/drawing/2014/main" id="{3E2B7505-9C58-C328-C6B9-6EC5AA4E7141}"/>
+              </a:ext>
+            </a:extLst>
+          </p:cNvPr>
+          <p:cNvSpPr/>
+          <p:nvPr/>
+        </p:nvSpPr>
+        <p:spPr>
+          <a:xfrm>
+            <a:off x="2460062" y="2614595"/>
+            <a:ext cx="4581282" cy="988666"/>
+          </a:xfrm>
+          <a:prstGeom prst="rect">
+            <a:avLst/>
+          </a:prstGeom>
+          <a:solidFill>
+            <a:srgbClr val="D8DFE3"/>
+          </a:solidFill>
+        </p:spPr>
+        <p:style>
+          <a:lnRef idx="2">
+            <a:schemeClr val="accent1">
+              <a:shade val="50000"/>
+            </a:schemeClr>
+          </a:lnRef>
+          <a:fillRef idx="1">
+            <a:schemeClr val="accent1"/>
+          </a:fillRef>
+          <a:effectRef idx="0">
+            <a:schemeClr val="accent1"/>
+          </a:effectRef>
+          <a:fontRef idx="minor">
+            <a:schemeClr val="lt1"/>
+          </a:fontRef>
+        </p:style>
+        <p:txBody>
+          <a:bodyPr rtlCol="0" anchor="ctr"/>
+          <a:lstStyle/>
+          <a:p>
+            <a:pPr algn="ctr"/>
+            <a:endParaRPr lang="LID4096" dirty="0"/>
+          </a:p>
+        </p:txBody>
+      </p:sp>
+      <p:sp>
+        <p:nvSpPr>
+          <p:cNvPr id="2" name="Title 1">
+            <a:extLst>
+              <a:ext uri="{FF2B5EF4-FFF2-40B4-BE49-F238E27FC236}">
+                <a16:creationId xmlns:a16="http://schemas.microsoft.com/office/drawing/2014/main" id="{3C1F0B6D-BC62-9134-6D8A-9E58E79D40E8}"/>
+              </a:ext>
+            </a:extLst>
+          </p:cNvPr>
+          <p:cNvSpPr>
+            <a:spLocks noGrp="1"/>
+          </p:cNvSpPr>
+          <p:nvPr>
+            <p:ph type="title"/>
+          </p:nvPr>
+        </p:nvSpPr>
+        <p:spPr/>
+        <p:txBody>
+          <a:bodyPr/>
+          <a:lstStyle/>
+          <a:p>
+            <a:r>
+              <a:rPr lang="en-US"/>
+              <a:t>miniLISA</a:t>
+            </a:r>
+            <a:r>
+              <a:rPr lang="en-US" dirty="0"/>
+              <a:t> Timing Jitters</a:t>
+            </a:r>
+            <a:endParaRPr lang="LID4096" dirty="0"/>
+          </a:p>
+        </p:txBody>
+      </p:sp>
+      <p:sp>
+        <p:nvSpPr>
+          <p:cNvPr id="4" name="Date Placeholder 3">
+            <a:extLst>
+              <a:ext uri="{FF2B5EF4-FFF2-40B4-BE49-F238E27FC236}">
+                <a16:creationId xmlns:a16="http://schemas.microsoft.com/office/drawing/2014/main" id="{DC6C800A-3254-32A2-AF00-F9C1E6F0FA8F}"/>
+              </a:ext>
+            </a:extLst>
+          </p:cNvPr>
+          <p:cNvSpPr>
+            <a:spLocks noGrp="1"/>
+          </p:cNvSpPr>
+          <p:nvPr>
+            <p:ph type="dt" sz="half" idx="10"/>
+          </p:nvPr>
+        </p:nvSpPr>
+        <p:spPr/>
+        <p:txBody>
+          <a:bodyPr/>
+          <a:lstStyle/>
+          <a:p>
+            <a:fld id="{E1CF8E31-244F-4A6A-A7D5-704B96C48AAE}" type="datetime1">
+              <a:rPr lang="et-EE" smtClean="0"/>
+              <a:t>07.11.2025</a:t>
+            </a:fld>
+            <a:endParaRPr lang="et-EE" dirty="0"/>
+          </a:p>
+        </p:txBody>
+      </p:sp>
+      <p:sp>
+        <p:nvSpPr>
+          <p:cNvPr id="5" name="Footer Placeholder 4">
+            <a:extLst>
+              <a:ext uri="{FF2B5EF4-FFF2-40B4-BE49-F238E27FC236}">
+                <a16:creationId xmlns:a16="http://schemas.microsoft.com/office/drawing/2014/main" id="{E53163DD-608E-4A51-C188-A396ACEFCADD}"/>
+              </a:ext>
+            </a:extLst>
+          </p:cNvPr>
+          <p:cNvSpPr>
+            <a:spLocks noGrp="1"/>
+          </p:cNvSpPr>
+          <p:nvPr>
+            <p:ph type="ftr" sz="quarter" idx="11"/>
+          </p:nvPr>
+        </p:nvSpPr>
+        <p:spPr/>
+        <p:txBody>
+          <a:bodyPr/>
+          <a:lstStyle/>
+          <a:p>
+            <a:r>
+              <a:rPr lang="et-EE"/>
+              <a:t>Weekly</a:t>
+            </a:r>
+          </a:p>
+        </p:txBody>
+      </p:sp>
+      <p:sp>
+        <p:nvSpPr>
+          <p:cNvPr id="6" name="Slide Number Placeholder 5">
+            <a:extLst>
+              <a:ext uri="{FF2B5EF4-FFF2-40B4-BE49-F238E27FC236}">
+                <a16:creationId xmlns:a16="http://schemas.microsoft.com/office/drawing/2014/main" id="{E8FE1221-66AE-6356-2B8E-FC76471E2D8B}"/>
+              </a:ext>
+            </a:extLst>
+          </p:cNvPr>
+          <p:cNvSpPr>
+            <a:spLocks noGrp="1"/>
+          </p:cNvSpPr>
+          <p:nvPr>
+            <p:ph type="sldNum" sz="quarter" idx="12"/>
+          </p:nvPr>
+        </p:nvSpPr>
+        <p:spPr/>
+        <p:txBody>
+          <a:bodyPr/>
+          <a:lstStyle/>
+          <a:p>
+            <a:fld id="{9F39E346-B1F3-4075-BD67-234EF0F10AC6}" type="slidenum">
+              <a:rPr lang="et-EE" smtClean="0"/>
+              <a:pPr/>
+              <a:t>8</a:t>
+            </a:fld>
+            <a:endParaRPr lang="et-EE" dirty="0"/>
+          </a:p>
+        </p:txBody>
+      </p:sp>
+      <p:pic>
+        <p:nvPicPr>
+          <p:cNvPr id="8" name="Graphic 7">
+            <a:extLst>
+              <a:ext uri="{FF2B5EF4-FFF2-40B4-BE49-F238E27FC236}">
+                <a16:creationId xmlns:a16="http://schemas.microsoft.com/office/drawing/2014/main" id="{6A22B67D-D573-64D8-ECC5-C906D043E736}"/>
+              </a:ext>
+            </a:extLst>
+          </p:cNvPr>
+          <p:cNvPicPr>
+            <a:picLocks noChangeAspect="1"/>
+          </p:cNvPicPr>
+          <p:nvPr/>
+        </p:nvPicPr>
+        <p:blipFill>
+          <a:blip r:embed="rId2">
+            <a:extLst>
+              <a:ext uri="{96DAC541-7B7A-43D3-8B79-37D633B846F1}">
+                <asvg:svgBlip xmlns:asvg="http://schemas.microsoft.com/office/drawing/2016/SVG/main" r:embed="rId3"/>
+              </a:ext>
+            </a:extLst>
+          </a:blip>
+          <a:stretch>
+            <a:fillRect/>
+          </a:stretch>
+        </p:blipFill>
+        <p:spPr>
+          <a:xfrm>
+            <a:off x="1596043" y="3481217"/>
+            <a:ext cx="517565" cy="517565"/>
+          </a:xfrm>
+          <a:prstGeom prst="rect">
+            <a:avLst/>
+          </a:prstGeom>
+        </p:spPr>
+      </p:pic>
+      <p:sp>
+        <p:nvSpPr>
+          <p:cNvPr id="17" name="Rectangle 16">
+            <a:extLst>
+              <a:ext uri="{FF2B5EF4-FFF2-40B4-BE49-F238E27FC236}">
+                <a16:creationId xmlns:a16="http://schemas.microsoft.com/office/drawing/2014/main" id="{4A9B9E5E-A8DE-5852-64ED-813357886E5E}"/>
+              </a:ext>
+            </a:extLst>
+          </p:cNvPr>
+          <p:cNvSpPr/>
+          <p:nvPr/>
+        </p:nvSpPr>
+        <p:spPr>
+          <a:xfrm>
+            <a:off x="2710705" y="2909524"/>
+            <a:ext cx="1290371" cy="430511"/>
+          </a:xfrm>
+          <a:prstGeom prst="rect">
+            <a:avLst/>
+          </a:prstGeom>
+        </p:spPr>
+        <p:style>
+          <a:lnRef idx="2">
+            <a:schemeClr val="accent1">
+              <a:shade val="50000"/>
+            </a:schemeClr>
+          </a:lnRef>
+          <a:fillRef idx="1">
+            <a:schemeClr val="accent1"/>
+          </a:fillRef>
+          <a:effectRef idx="0">
+            <a:schemeClr val="accent1"/>
+          </a:effectRef>
+          <a:fontRef idx="minor">
+            <a:schemeClr val="lt1"/>
+          </a:fontRef>
+        </p:style>
+        <p:txBody>
+          <a:bodyPr rtlCol="0" anchor="ctr"/>
+          <a:lstStyle/>
+          <a:p>
+            <a:pPr algn="ctr"/>
+            <a:r>
+              <a:rPr lang="en-US" sz="1400" b="1" dirty="0">
+                <a:solidFill>
+                  <a:schemeClr val="bg1"/>
+                </a:solidFill>
+                <a:latin typeface="Arial" panose="020B0604020202020204" pitchFamily="34" charset="0"/>
+                <a:cs typeface="Arial" panose="020B0604020202020204" pitchFamily="34" charset="0"/>
+              </a:rPr>
+              <a:t>Function Generator</a:t>
+            </a:r>
+            <a:endParaRPr lang="LID4096" sz="1400" b="1" dirty="0">
+              <a:solidFill>
+                <a:schemeClr val="bg1"/>
+              </a:solidFill>
+              <a:latin typeface="Arial" panose="020B0604020202020204" pitchFamily="34" charset="0"/>
+              <a:cs typeface="Arial" panose="020B0604020202020204" pitchFamily="34" charset="0"/>
+            </a:endParaRPr>
+          </a:p>
+        </p:txBody>
+      </p:sp>
+      <p:sp>
+        <p:nvSpPr>
+          <p:cNvPr id="19" name="Rectangle 18">
+            <a:extLst>
+              <a:ext uri="{FF2B5EF4-FFF2-40B4-BE49-F238E27FC236}">
+                <a16:creationId xmlns:a16="http://schemas.microsoft.com/office/drawing/2014/main" id="{70D2B1A3-64E3-B529-374A-B1BBEFF5A3E6}"/>
+              </a:ext>
+            </a:extLst>
+          </p:cNvPr>
+          <p:cNvSpPr/>
+          <p:nvPr/>
+        </p:nvSpPr>
+        <p:spPr>
+          <a:xfrm>
+            <a:off x="4325218" y="1387361"/>
+            <a:ext cx="1290371" cy="430511"/>
+          </a:xfrm>
+          <a:prstGeom prst="rect">
+            <a:avLst/>
+          </a:prstGeom>
+        </p:spPr>
+        <p:style>
+          <a:lnRef idx="2">
+            <a:schemeClr val="accent1">
+              <a:shade val="50000"/>
+            </a:schemeClr>
+          </a:lnRef>
+          <a:fillRef idx="1">
+            <a:schemeClr val="accent1"/>
+          </a:fillRef>
+          <a:effectRef idx="0">
+            <a:schemeClr val="accent1"/>
+          </a:effectRef>
+          <a:fontRef idx="minor">
+            <a:schemeClr val="lt1"/>
+          </a:fontRef>
+        </p:style>
+        <p:txBody>
+          <a:bodyPr rtlCol="0" anchor="ctr"/>
+          <a:lstStyle/>
+          <a:p>
+            <a:pPr algn="ctr"/>
+            <a:r>
+              <a:rPr lang="en-US" sz="1400" b="1" dirty="0">
+                <a:solidFill>
+                  <a:schemeClr val="bg1"/>
+                </a:solidFill>
+                <a:latin typeface="Arial" panose="020B0604020202020204" pitchFamily="34" charset="0"/>
+                <a:cs typeface="Arial" panose="020B0604020202020204" pitchFamily="34" charset="0"/>
+              </a:rPr>
+              <a:t>Sideband EOM</a:t>
+            </a:r>
+            <a:endParaRPr lang="LID4096" sz="1400" b="1" dirty="0">
+              <a:solidFill>
+                <a:schemeClr val="bg1"/>
+              </a:solidFill>
+              <a:latin typeface="Arial" panose="020B0604020202020204" pitchFamily="34" charset="0"/>
+              <a:cs typeface="Arial" panose="020B0604020202020204" pitchFamily="34" charset="0"/>
+            </a:endParaRPr>
+          </a:p>
+        </p:txBody>
+      </p:sp>
+      <p:sp>
+        <p:nvSpPr>
+          <p:cNvPr id="23" name="TextBox 22">
+            <a:extLst>
+              <a:ext uri="{FF2B5EF4-FFF2-40B4-BE49-F238E27FC236}">
+                <a16:creationId xmlns:a16="http://schemas.microsoft.com/office/drawing/2014/main" id="{0639D8D9-F39D-AE39-84C5-DE8FAAFB0C31}"/>
+              </a:ext>
+            </a:extLst>
+          </p:cNvPr>
+          <p:cNvSpPr txBox="1"/>
+          <p:nvPr/>
+        </p:nvSpPr>
+        <p:spPr>
+          <a:xfrm>
+            <a:off x="570918" y="3530909"/>
+            <a:ext cx="1148025" cy="430887"/>
+          </a:xfrm>
+          <a:prstGeom prst="rect">
+            <a:avLst/>
+          </a:prstGeom>
+          <a:noFill/>
+        </p:spPr>
+        <p:txBody>
+          <a:bodyPr wrap="square" rtlCol="0">
+            <a:spAutoFit/>
+          </a:bodyPr>
+          <a:lstStyle/>
+          <a:p>
+            <a:pPr algn="ctr"/>
+            <a:r>
+              <a:rPr lang="en-US" sz="1400" dirty="0">
+                <a:solidFill>
+                  <a:srgbClr val="667982"/>
+                </a:solidFill>
+                <a:latin typeface="Arial" panose="020B0604020202020204" pitchFamily="34" charset="0"/>
+                <a:cs typeface="Arial" panose="020B0604020202020204" pitchFamily="34" charset="0"/>
+              </a:rPr>
+              <a:t>Rb CLOCK</a:t>
+            </a:r>
+          </a:p>
+          <a:p>
+            <a:pPr algn="ctr"/>
+            <a:r>
+              <a:rPr lang="en-US" sz="800" dirty="0">
+                <a:solidFill>
+                  <a:srgbClr val="667982"/>
+                </a:solidFill>
+                <a:latin typeface="Arial" panose="020B0604020202020204" pitchFamily="34" charset="0"/>
+                <a:cs typeface="Arial" panose="020B0604020202020204" pitchFamily="34" charset="0"/>
+              </a:rPr>
+              <a:t>10 MHz</a:t>
+            </a:r>
+            <a:endParaRPr lang="LID4096" sz="800" dirty="0">
+              <a:solidFill>
+                <a:srgbClr val="667982"/>
+              </a:solidFill>
+              <a:latin typeface="Arial" panose="020B0604020202020204" pitchFamily="34" charset="0"/>
+              <a:cs typeface="Arial" panose="020B0604020202020204" pitchFamily="34" charset="0"/>
+            </a:endParaRPr>
+          </a:p>
+        </p:txBody>
+      </p:sp>
+      <p:cxnSp>
+        <p:nvCxnSpPr>
+          <p:cNvPr id="27" name="Connector: Curved 26">
+            <a:extLst>
+              <a:ext uri="{FF2B5EF4-FFF2-40B4-BE49-F238E27FC236}">
+                <a16:creationId xmlns:a16="http://schemas.microsoft.com/office/drawing/2014/main" id="{8823952F-2131-8C30-726D-BBC5CB994F3B}"/>
+              </a:ext>
+            </a:extLst>
+          </p:cNvPr>
+          <p:cNvCxnSpPr>
+            <a:stCxn id="8" idx="0"/>
+            <a:endCxn id="17" idx="1"/>
+          </p:cNvCxnSpPr>
+          <p:nvPr/>
+        </p:nvCxnSpPr>
+        <p:spPr>
+          <a:xfrm rot="5400000" flipH="1" flipV="1">
+            <a:off x="2104547" y="2875060"/>
+            <a:ext cx="356437" cy="855879"/>
+          </a:xfrm>
+          <a:prstGeom prst="curvedConnector2">
+            <a:avLst/>
+          </a:prstGeom>
+          <a:ln w="28575">
+            <a:tailEnd type="triangle"/>
+          </a:ln>
+        </p:spPr>
+        <p:style>
+          <a:lnRef idx="1">
+            <a:schemeClr val="accent4"/>
+          </a:lnRef>
+          <a:fillRef idx="0">
+            <a:schemeClr val="accent4"/>
+          </a:fillRef>
+          <a:effectRef idx="0">
+            <a:schemeClr val="accent4"/>
+          </a:effectRef>
+          <a:fontRef idx="minor">
+            <a:schemeClr val="tx1"/>
+          </a:fontRef>
+        </p:style>
+      </p:cxnSp>
+      <p:cxnSp>
+        <p:nvCxnSpPr>
+          <p:cNvPr id="33" name="Connector: Curved 32">
+            <a:extLst>
+              <a:ext uri="{FF2B5EF4-FFF2-40B4-BE49-F238E27FC236}">
+                <a16:creationId xmlns:a16="http://schemas.microsoft.com/office/drawing/2014/main" id="{1D753214-A460-490C-2011-B0605EB71DEB}"/>
+              </a:ext>
+            </a:extLst>
+          </p:cNvPr>
+          <p:cNvCxnSpPr>
+            <a:stCxn id="17" idx="3"/>
+            <a:endCxn id="19" idx="2"/>
+          </p:cNvCxnSpPr>
+          <p:nvPr/>
+        </p:nvCxnSpPr>
+        <p:spPr>
+          <a:xfrm flipV="1">
+            <a:off x="4001076" y="1817872"/>
+            <a:ext cx="969328" cy="1306908"/>
+          </a:xfrm>
+          <a:prstGeom prst="curvedConnector2">
+            <a:avLst/>
+          </a:prstGeom>
+          <a:ln w="28575">
+            <a:tailEnd type="triangle"/>
+          </a:ln>
+        </p:spPr>
+        <p:style>
+          <a:lnRef idx="1">
+            <a:schemeClr val="accent4"/>
+          </a:lnRef>
+          <a:fillRef idx="0">
+            <a:schemeClr val="accent4"/>
+          </a:fillRef>
+          <a:effectRef idx="0">
+            <a:schemeClr val="accent4"/>
+          </a:effectRef>
+          <a:fontRef idx="minor">
+            <a:schemeClr val="tx1"/>
+          </a:fontRef>
+        </p:style>
+      </p:cxnSp>
+      <p:cxnSp>
+        <p:nvCxnSpPr>
+          <p:cNvPr id="41" name="Connector: Curved 40">
+            <a:extLst>
+              <a:ext uri="{FF2B5EF4-FFF2-40B4-BE49-F238E27FC236}">
+                <a16:creationId xmlns:a16="http://schemas.microsoft.com/office/drawing/2014/main" id="{81ABF5D6-18E1-AEC2-A9F4-033CF9DD1BBA}"/>
+              </a:ext>
+            </a:extLst>
+          </p:cNvPr>
+          <p:cNvCxnSpPr>
+            <a:cxnSpLocks/>
+            <a:stCxn id="17" idx="3"/>
+            <a:endCxn id="45" idx="1"/>
+          </p:cNvCxnSpPr>
+          <p:nvPr/>
+        </p:nvCxnSpPr>
+        <p:spPr>
+          <a:xfrm>
+            <a:off x="4001076" y="3124780"/>
+            <a:ext cx="4101655" cy="6350"/>
+          </a:xfrm>
+          <a:prstGeom prst="curvedConnector3">
+            <a:avLst/>
+          </a:prstGeom>
+          <a:ln w="28575">
+            <a:tailEnd type="triangle"/>
+          </a:ln>
+        </p:spPr>
+        <p:style>
+          <a:lnRef idx="1">
+            <a:schemeClr val="accent4"/>
+          </a:lnRef>
+          <a:fillRef idx="0">
+            <a:schemeClr val="accent4"/>
+          </a:fillRef>
+          <a:effectRef idx="0">
+            <a:schemeClr val="accent4"/>
+          </a:effectRef>
+          <a:fontRef idx="minor">
+            <a:schemeClr val="tx1"/>
+          </a:fontRef>
+        </p:style>
+      </p:cxnSp>
+      <p:sp>
+        <p:nvSpPr>
+          <p:cNvPr id="45" name="Rectangle 44">
+            <a:extLst>
+              <a:ext uri="{FF2B5EF4-FFF2-40B4-BE49-F238E27FC236}">
+                <a16:creationId xmlns:a16="http://schemas.microsoft.com/office/drawing/2014/main" id="{EBE33605-CCAD-E6EF-1474-E8D1F996719D}"/>
+              </a:ext>
+            </a:extLst>
+          </p:cNvPr>
+          <p:cNvSpPr/>
+          <p:nvPr/>
+        </p:nvSpPr>
+        <p:spPr>
+          <a:xfrm>
+            <a:off x="8102731" y="2915874"/>
+            <a:ext cx="1290371" cy="430511"/>
+          </a:xfrm>
+          <a:prstGeom prst="rect">
+            <a:avLst/>
+          </a:prstGeom>
+        </p:spPr>
+        <p:style>
+          <a:lnRef idx="2">
+            <a:schemeClr val="accent1">
+              <a:shade val="50000"/>
+            </a:schemeClr>
+          </a:lnRef>
+          <a:fillRef idx="1">
+            <a:schemeClr val="accent1"/>
+          </a:fillRef>
+          <a:effectRef idx="0">
+            <a:schemeClr val="accent1"/>
+          </a:effectRef>
+          <a:fontRef idx="minor">
+            <a:schemeClr val="lt1"/>
+          </a:fontRef>
+        </p:style>
+        <p:txBody>
+          <a:bodyPr rtlCol="0" anchor="ctr"/>
+          <a:lstStyle/>
+          <a:p>
+            <a:pPr algn="ctr"/>
+            <a:r>
+              <a:rPr lang="en-US" sz="1400" b="1" dirty="0">
+                <a:solidFill>
+                  <a:schemeClr val="bg1"/>
+                </a:solidFill>
+                <a:latin typeface="Arial" panose="020B0604020202020204" pitchFamily="34" charset="0"/>
+                <a:cs typeface="Arial" panose="020B0604020202020204" pitchFamily="34" charset="0"/>
+              </a:rPr>
+              <a:t>PM ADC Channels</a:t>
+            </a:r>
+            <a:endParaRPr lang="LID4096" sz="1400" b="1" dirty="0">
+              <a:solidFill>
+                <a:schemeClr val="bg1"/>
+              </a:solidFill>
+              <a:latin typeface="Arial" panose="020B0604020202020204" pitchFamily="34" charset="0"/>
+              <a:cs typeface="Arial" panose="020B0604020202020204" pitchFamily="34" charset="0"/>
+            </a:endParaRPr>
+          </a:p>
+        </p:txBody>
+      </p:sp>
+      <p:sp>
+        <p:nvSpPr>
+          <p:cNvPr id="48" name="TextBox 47">
+            <a:extLst>
+              <a:ext uri="{FF2B5EF4-FFF2-40B4-BE49-F238E27FC236}">
+                <a16:creationId xmlns:a16="http://schemas.microsoft.com/office/drawing/2014/main" id="{69A163AC-F442-E9D8-5B0E-FC49AC56504E}"/>
+              </a:ext>
+            </a:extLst>
+          </p:cNvPr>
+          <p:cNvSpPr txBox="1"/>
+          <p:nvPr/>
+        </p:nvSpPr>
+        <p:spPr>
+          <a:xfrm>
+            <a:off x="2460061" y="2103977"/>
+            <a:ext cx="2439150" cy="523220"/>
+          </a:xfrm>
+          <a:prstGeom prst="rect">
+            <a:avLst/>
+          </a:prstGeom>
+          <a:noFill/>
+        </p:spPr>
+        <p:txBody>
+          <a:bodyPr wrap="square" rtlCol="0">
+            <a:spAutoFit/>
+          </a:bodyPr>
+          <a:lstStyle/>
+          <a:p>
+            <a:pPr algn="l"/>
+            <a:r>
+              <a:rPr lang="en-US" sz="1400" dirty="0">
+                <a:solidFill>
+                  <a:srgbClr val="667982"/>
+                </a:solidFill>
+                <a:latin typeface="Arial" panose="020B0604020202020204" pitchFamily="34" charset="0"/>
+                <a:cs typeface="Arial" panose="020B0604020202020204" pitchFamily="34" charset="0"/>
+              </a:rPr>
+              <a:t>(Left-side) Frequency Distribution Module</a:t>
+            </a:r>
+            <a:endParaRPr lang="LID4096" sz="1400" dirty="0">
+              <a:solidFill>
+                <a:srgbClr val="667982"/>
+              </a:solidFill>
+              <a:latin typeface="Arial" panose="020B0604020202020204" pitchFamily="34" charset="0"/>
+              <a:cs typeface="Arial" panose="020B0604020202020204" pitchFamily="34" charset="0"/>
+            </a:endParaRPr>
+          </a:p>
+        </p:txBody>
+      </p:sp>
+      <p:sp>
+        <p:nvSpPr>
+          <p:cNvPr id="66" name="TextBox 65">
+            <a:extLst>
+              <a:ext uri="{FF2B5EF4-FFF2-40B4-BE49-F238E27FC236}">
+                <a16:creationId xmlns:a16="http://schemas.microsoft.com/office/drawing/2014/main" id="{1B86DAE7-10D4-F68B-821C-523FBA27CCBC}"/>
+              </a:ext>
+            </a:extLst>
+          </p:cNvPr>
+          <p:cNvSpPr txBox="1"/>
+          <p:nvPr/>
+        </p:nvSpPr>
+        <p:spPr>
+          <a:xfrm>
+            <a:off x="7091217" y="2835469"/>
+            <a:ext cx="967829" cy="307777"/>
+          </a:xfrm>
+          <a:prstGeom prst="rect">
+            <a:avLst/>
+          </a:prstGeom>
+          <a:noFill/>
+        </p:spPr>
+        <p:txBody>
+          <a:bodyPr wrap="none" rtlCol="0">
+            <a:spAutoFit/>
+          </a:bodyPr>
+          <a:lstStyle/>
+          <a:p>
+            <a:pPr algn="l"/>
+            <a:r>
+              <a:rPr lang="en-US" sz="1400" dirty="0">
+                <a:solidFill>
+                  <a:srgbClr val="667982"/>
+                </a:solidFill>
+                <a:latin typeface="Arial" panose="020B0604020202020204" pitchFamily="34" charset="0"/>
+                <a:cs typeface="Arial" panose="020B0604020202020204" pitchFamily="34" charset="0"/>
+              </a:rPr>
+              <a:t>Pilot Tone</a:t>
+            </a:r>
+            <a:endParaRPr lang="LID4096" sz="1400" dirty="0">
+              <a:solidFill>
+                <a:srgbClr val="667982"/>
+              </a:solidFill>
+              <a:latin typeface="Arial" panose="020B0604020202020204" pitchFamily="34" charset="0"/>
+              <a:cs typeface="Arial" panose="020B0604020202020204" pitchFamily="34" charset="0"/>
+            </a:endParaRPr>
+          </a:p>
+        </p:txBody>
+      </p:sp>
+      <p:sp>
+        <p:nvSpPr>
+          <p:cNvPr id="9" name="TextBox 8">
+            <a:extLst>
+              <a:ext uri="{FF2B5EF4-FFF2-40B4-BE49-F238E27FC236}">
+                <a16:creationId xmlns:a16="http://schemas.microsoft.com/office/drawing/2014/main" id="{6A919051-5373-1886-DBE0-A53A78AC9035}"/>
+              </a:ext>
+            </a:extLst>
+          </p:cNvPr>
+          <p:cNvSpPr txBox="1"/>
+          <p:nvPr/>
+        </p:nvSpPr>
+        <p:spPr>
+          <a:xfrm>
+            <a:off x="9581519" y="3232671"/>
+            <a:ext cx="1882011" cy="523220"/>
+          </a:xfrm>
+          <a:prstGeom prst="rect">
+            <a:avLst/>
+          </a:prstGeom>
+          <a:noFill/>
+        </p:spPr>
+        <p:txBody>
+          <a:bodyPr wrap="square" rtlCol="0">
+            <a:spAutoFit/>
+          </a:bodyPr>
+          <a:lstStyle/>
+          <a:p>
+            <a:pPr algn="l"/>
+            <a:r>
+              <a:rPr lang="en-US" sz="1400" dirty="0">
+                <a:solidFill>
+                  <a:srgbClr val="667982"/>
+                </a:solidFill>
+                <a:latin typeface="Arial" panose="020B0604020202020204" pitchFamily="34" charset="0"/>
+                <a:cs typeface="Arial" panose="020B0604020202020204" pitchFamily="34" charset="0"/>
+              </a:rPr>
+              <a:t>SC1, 12 side or</a:t>
+            </a:r>
+          </a:p>
+          <a:p>
+            <a:pPr algn="l"/>
+            <a:r>
+              <a:rPr lang="en-US" sz="1400" dirty="0">
+                <a:solidFill>
+                  <a:srgbClr val="667982"/>
+                </a:solidFill>
+                <a:latin typeface="Arial" panose="020B0604020202020204" pitchFamily="34" charset="0"/>
+                <a:cs typeface="Arial" panose="020B0604020202020204" pitchFamily="34" charset="0"/>
+              </a:rPr>
+              <a:t>SC1 left side</a:t>
+            </a:r>
+          </a:p>
+        </p:txBody>
+      </p:sp>
       <mc:AlternateContent xmlns:mc="http://schemas.openxmlformats.org/markup-compatibility/2006" xmlns:a14="http://schemas.microsoft.com/office/drawing/2010/main">
         <mc:Choice Requires="a14">
           <p:sp>
@@ -9897,7 +11803,7 @@
               <p:cNvPr id="40" name="TextBox 39">
                 <a:extLst>
                   <a:ext uri="{FF2B5EF4-FFF2-40B4-BE49-F238E27FC236}">
-                    <a16:creationId xmlns:a16="http://schemas.microsoft.com/office/drawing/2014/main" id="{9B92F738-6D97-4C46-984B-CD792E8A77FC}"/>
+                    <a16:creationId xmlns:a16="http://schemas.microsoft.com/office/drawing/2014/main" id="{39FF08A6-2FB6-F903-F481-868A052E9A21}"/>
                   </a:ext>
                 </a:extLst>
               </p:cNvPr>
@@ -10058,7 +11964,7 @@
           <p:cNvPr id="11" name="Straight Connector 10">
             <a:extLst>
               <a:ext uri="{FF2B5EF4-FFF2-40B4-BE49-F238E27FC236}">
-                <a16:creationId xmlns:a16="http://schemas.microsoft.com/office/drawing/2014/main" id="{8D079494-969C-42B3-AB1A-D7E3A167C5B3}"/>
+                <a16:creationId xmlns:a16="http://schemas.microsoft.com/office/drawing/2014/main" id="{2F0F328E-BC0C-301B-3926-C5A9BF4305E2}"/>
               </a:ext>
             </a:extLst>
           </p:cNvPr>
@@ -10108,7 +12014,7 @@
               <p:cNvPr id="58" name="TextBox 57">
                 <a:extLst>
                   <a:ext uri="{FF2B5EF4-FFF2-40B4-BE49-F238E27FC236}">
-                    <a16:creationId xmlns:a16="http://schemas.microsoft.com/office/drawing/2014/main" id="{83F0F518-04B2-45FC-9688-09BAEBC1F934}"/>
+                    <a16:creationId xmlns:a16="http://schemas.microsoft.com/office/drawing/2014/main" id="{BC11741B-7ED9-6F3E-523D-F22CC92BB5DA}"/>
                   </a:ext>
                 </a:extLst>
               </p:cNvPr>
@@ -10269,7 +12175,7 @@
           <p:cNvPr id="3" name="TextBox 2">
             <a:extLst>
               <a:ext uri="{FF2B5EF4-FFF2-40B4-BE49-F238E27FC236}">
-                <a16:creationId xmlns:a16="http://schemas.microsoft.com/office/drawing/2014/main" id="{73AF7F7F-A72D-40A5-9A91-7A6E6669C514}"/>
+                <a16:creationId xmlns:a16="http://schemas.microsoft.com/office/drawing/2014/main" id="{DC662E42-C74D-BBF2-18D2-8012E8E83C60}"/>
               </a:ext>
             </a:extLst>
           </p:cNvPr>
@@ -10322,7 +12228,7 @@
     </p:spTree>
     <p:extLst>
       <p:ext uri="{BB962C8B-B14F-4D97-AF65-F5344CB8AC3E}">
-        <p14:creationId xmlns:p14="http://schemas.microsoft.com/office/powerpoint/2010/main" val="3391226487"/>
+        <p14:creationId xmlns:p14="http://schemas.microsoft.com/office/powerpoint/2010/main" val="2493457391"/>
       </p:ext>
     </p:extLst>
   </p:cSld>
@@ -10332,8 +12238,8 @@
 </p:sld>
 </file>
 
-<file path=ppt/slides/slide5.xml><?xml version="1.0" encoding="utf-8"?>
-<p:sld xmlns:a="http://schemas.openxmlformats.org/drawingml/2006/main" xmlns:r="http://schemas.openxmlformats.org/officeDocument/2006/relationships" xmlns:p="http://schemas.openxmlformats.org/presentationml/2006/main">
+<file path=ppt/slides/slide9.xml><?xml version="1.0" encoding="utf-8"?>
+<p:sld xmlns:a="http://schemas.openxmlformats.org/drawingml/2006/main" xmlns:r="http://schemas.openxmlformats.org/officeDocument/2006/relationships" xmlns:p="http://schemas.openxmlformats.org/presentationml/2006/main" show="0">
   <p:cSld>
     <p:spTree>
       <p:nvGrpSpPr>
@@ -10510,7 +12416,7 @@
           <a:p>
             <a:fld id="{E1CF8E31-244F-4A6A-A7D5-704B96C48AAE}" type="datetime1">
               <a:rPr lang="et-EE" smtClean="0"/>
-              <a:t>04.11.2025</a:t>
+              <a:t>06.11.2025</a:t>
             </a:fld>
             <a:endParaRPr lang="et-EE" dirty="0"/>
           </a:p>
@@ -10568,7 +12474,7 @@
             <a:fld id="{9F39E346-B1F3-4075-BD67-234EF0F10AC6}" type="slidenum">
               <a:rPr lang="et-EE" smtClean="0"/>
               <a:pPr/>
-              <a:t>5</a:t>
+              <a:t>9</a:t>
             </a:fld>
             <a:endParaRPr lang="et-EE" dirty="0"/>
           </a:p>

--- a/frequency distribution.pptx
+++ b/frequency distribution.pptx
@@ -223,7 +223,7 @@
           <a:p>
             <a:fld id="{AB81B2D2-06A2-4596-9391-656CA05E965F}" type="datetimeFigureOut">
               <a:rPr lang="et-EE" smtClean="0"/>
-              <a:t>06.11.2025</a:t>
+              <a:t>07.11.2025</a:t>
             </a:fld>
             <a:endParaRPr lang="et-EE"/>
           </a:p>
@@ -637,7 +637,7 @@
           <a:p>
             <a:fld id="{0E412FDE-1CFE-48F6-820F-9C443C301228}" type="datetime1">
               <a:rPr lang="et-EE" smtClean="0"/>
-              <a:t>06.11.2025</a:t>
+              <a:t>07.11.2025</a:t>
             </a:fld>
             <a:endParaRPr lang="et-EE" dirty="0"/>
           </a:p>
@@ -821,7 +821,7 @@
           <a:p>
             <a:fld id="{B64C0CFC-214E-42F4-8B82-CC6D451BD70F}" type="datetime1">
               <a:rPr lang="et-EE" smtClean="0"/>
-              <a:t>06.11.2025</a:t>
+              <a:t>07.11.2025</a:t>
             </a:fld>
             <a:endParaRPr lang="et-EE"/>
           </a:p>
@@ -1004,7 +1004,7 @@
           <a:p>
             <a:fld id="{5AB58BF1-41C1-47B8-ACAE-F9884B88C63A}" type="datetime1">
               <a:rPr lang="et-EE" smtClean="0"/>
-              <a:t>06.11.2025</a:t>
+              <a:t>07.11.2025</a:t>
             </a:fld>
             <a:endParaRPr lang="et-EE"/>
           </a:p>
@@ -1266,7 +1266,7 @@
           <a:p>
             <a:fld id="{E1CF8E31-244F-4A6A-A7D5-704B96C48AAE}" type="datetime1">
               <a:rPr lang="et-EE" smtClean="0"/>
-              <a:t>06.11.2025</a:t>
+              <a:t>07.11.2025</a:t>
             </a:fld>
             <a:endParaRPr lang="et-EE" dirty="0"/>
           </a:p>
@@ -1978,7 +1978,7 @@
           <a:p>
             <a:fld id="{CF92296B-3A94-4787-AA7D-8DC0AEE88FD4}" type="datetime1">
               <a:rPr lang="et-EE" smtClean="0"/>
-              <a:t>06.11.2025</a:t>
+              <a:t>07.11.2025</a:t>
             </a:fld>
             <a:endParaRPr lang="et-EE"/>
           </a:p>
@@ -2348,7 +2348,7 @@
           <a:p>
             <a:fld id="{185751C1-87AF-4EAC-9696-BB82432B7753}" type="datetime1">
               <a:rPr lang="et-EE" smtClean="0"/>
-              <a:t>06.11.2025</a:t>
+              <a:t>07.11.2025</a:t>
             </a:fld>
             <a:endParaRPr lang="et-EE"/>
           </a:p>
@@ -2446,7 +2446,7 @@
           <a:p>
             <a:fld id="{E493E3B0-4572-4FE0-8E55-6746BFAADA96}" type="datetime1">
               <a:rPr lang="et-EE" smtClean="0"/>
-              <a:t>06.11.2025</a:t>
+              <a:t>07.11.2025</a:t>
             </a:fld>
             <a:endParaRPr lang="et-EE"/>
           </a:p>
@@ -2591,7 +2591,7 @@
           <a:p>
             <a:fld id="{EE4C4D14-98D7-455C-9D0D-2863E0C0AA0D}" type="datetime1">
               <a:rPr lang="et-EE" smtClean="0"/>
-              <a:t>06.11.2025</a:t>
+              <a:t>07.11.2025</a:t>
             </a:fld>
             <a:endParaRPr lang="et-EE"/>
           </a:p>
@@ -2871,7 +2871,7 @@
           <a:p>
             <a:fld id="{94997DBE-8AE5-4A6F-9E25-F62C693D8ED5}" type="datetime1">
               <a:rPr lang="et-EE" smtClean="0"/>
-              <a:t>06.11.2025</a:t>
+              <a:t>07.11.2025</a:t>
             </a:fld>
             <a:endParaRPr lang="et-EE"/>
           </a:p>
@@ -3131,7 +3131,7 @@
           <a:p>
             <a:fld id="{DA3B51F9-97BE-4EFF-9934-D6DB8E40FF5E}" type="datetime1">
               <a:rPr lang="et-EE" smtClean="0"/>
-              <a:t>06.11.2025</a:t>
+              <a:t>07.11.2025</a:t>
             </a:fld>
             <a:endParaRPr lang="et-EE"/>
           </a:p>
@@ -3348,7 +3348,7 @@
           <a:p>
             <a:fld id="{E7C7EEDD-722C-4F14-9239-A37AD281B51F}" type="datetime1">
               <a:rPr lang="et-EE" smtClean="0"/>
-              <a:t>06.11.2025</a:t>
+              <a:t>07.11.2025</a:t>
             </a:fld>
             <a:endParaRPr lang="et-EE" dirty="0"/>
           </a:p>
@@ -3742,7 +3742,7 @@
 </file>
 
 <file path=ppt/slides/slide1.xml><?xml version="1.0" encoding="utf-8"?>
-<p:sld xmlns:a="http://schemas.openxmlformats.org/drawingml/2006/main" xmlns:r="http://schemas.openxmlformats.org/officeDocument/2006/relationships" xmlns:p="http://schemas.openxmlformats.org/presentationml/2006/main">
+<p:sld xmlns:a="http://schemas.openxmlformats.org/drawingml/2006/main" xmlns:r="http://schemas.openxmlformats.org/officeDocument/2006/relationships" xmlns:p="http://schemas.openxmlformats.org/presentationml/2006/main" show="0">
   <p:cSld>
     <p:spTree>
       <p:nvGrpSpPr>
@@ -3814,7 +3814,7 @@
           <a:p>
             <a:fld id="{E1CF8E31-244F-4A6A-A7D5-704B96C48AAE}" type="datetime1">
               <a:rPr lang="et-EE" smtClean="0"/>
-              <a:t>06.11.2025</a:t>
+              <a:t>07.11.2025</a:t>
             </a:fld>
             <a:endParaRPr lang="et-EE" dirty="0"/>
           </a:p>
@@ -4336,7 +4336,7 @@
           <a:p>
             <a:fld id="{E1CF8E31-244F-4A6A-A7D5-704B96C48AAE}" type="datetime1">
               <a:rPr lang="et-EE" smtClean="0"/>
-              <a:t>06.11.2025</a:t>
+              <a:t>07.11.2025</a:t>
             </a:fld>
             <a:endParaRPr lang="et-EE" dirty="0"/>
           </a:p>
@@ -5914,7 +5914,7 @@
           <a:p>
             <a:fld id="{E1CF8E31-244F-4A6A-A7D5-704B96C48AAE}" type="datetime1">
               <a:rPr lang="et-EE" smtClean="0"/>
-              <a:t>06.11.2025</a:t>
+              <a:t>07.11.2025</a:t>
             </a:fld>
             <a:endParaRPr lang="et-EE" dirty="0"/>
           </a:p>
@@ -9232,12 +9232,12 @@
           <a:lstStyle/>
           <a:p>
             <a:r>
-              <a:rPr lang="en-US"/>
+              <a:rPr lang="en-US" dirty="0" err="1"/>
               <a:t>miniLISA</a:t>
             </a:r>
             <a:r>
               <a:rPr lang="en-US" dirty="0"/>
-              <a:t> Timing Jitters</a:t>
+              <a:t> version</a:t>
             </a:r>
             <a:endParaRPr lang="LID4096" dirty="0"/>
           </a:p>
@@ -9266,7 +9266,7 @@
           <a:p>
             <a:fld id="{E1CF8E31-244F-4A6A-A7D5-704B96C48AAE}" type="datetime1">
               <a:rPr lang="et-EE" smtClean="0"/>
-              <a:t>06.11.2025</a:t>
+              <a:t>07.11.2025</a:t>
             </a:fld>
             <a:endParaRPr lang="et-EE" dirty="0"/>
           </a:p>
@@ -10365,7 +10365,7 @@
             <p:ph idx="1"/>
             <p:extLst>
               <p:ext uri="{D42A27DB-BD31-4B8C-83A1-F6EECF244321}">
-                <p14:modId xmlns:p14="http://schemas.microsoft.com/office/powerpoint/2010/main" val="3934800294"/>
+                <p14:modId xmlns:p14="http://schemas.microsoft.com/office/powerpoint/2010/main" val="181537011"/>
               </p:ext>
             </p:extLst>
           </p:nvPr>
@@ -10449,6 +10449,27 @@
                     <a:bodyPr/>
                     <a:lstStyle/>
                     <a:p>
+                      <a:r>
+                        <a:rPr lang="en-US" dirty="0" err="1">
+                          <a:latin typeface="Arial" panose="020B0604020202020204" pitchFamily="34" charset="0"/>
+                          <a:cs typeface="Arial" panose="020B0604020202020204" pitchFamily="34" charset="0"/>
+                        </a:rPr>
+                        <a:t>Moku</a:t>
+                      </a:r>
+                      <a:r>
+                        <a:rPr lang="en-US" dirty="0">
+                          <a:latin typeface="Arial" panose="020B0604020202020204" pitchFamily="34" charset="0"/>
+                          <a:cs typeface="Arial" panose="020B0604020202020204" pitchFamily="34" charset="0"/>
+                        </a:rPr>
+                        <a:t> (# </a:t>
+                      </a:r>
+                      <a:r>
+                        <a:rPr lang="en-US">
+                          <a:latin typeface="Arial" panose="020B0604020202020204" pitchFamily="34" charset="0"/>
+                          <a:cs typeface="Arial" panose="020B0604020202020204" pitchFamily="34" charset="0"/>
+                        </a:rPr>
+                        <a:t>of channels)</a:t>
+                      </a:r>
                       <a:endParaRPr lang="et-EE" dirty="0">
                         <a:latin typeface="Arial" panose="020B0604020202020204" pitchFamily="34" charset="0"/>
                         <a:cs typeface="Arial" panose="020B0604020202020204" pitchFamily="34" charset="0"/>
@@ -12416,7 +12437,7 @@
           <a:p>
             <a:fld id="{E1CF8E31-244F-4A6A-A7D5-704B96C48AAE}" type="datetime1">
               <a:rPr lang="et-EE" smtClean="0"/>
-              <a:t>06.11.2025</a:t>
+              <a:t>07.11.2025</a:t>
             </a:fld>
             <a:endParaRPr lang="et-EE" dirty="0"/>
           </a:p>
